--- a/Brenner framework/Figures.pptx
+++ b/Brenner framework/Figures.pptx
@@ -7,6 +7,9 @@
   <p:sldIdLst>
     <p:sldId id="257" r:id="rId2"/>
     <p:sldId id="258" r:id="rId3"/>
+    <p:sldId id="259" r:id="rId4"/>
+    <p:sldId id="261" r:id="rId5"/>
+    <p:sldId id="262" r:id="rId6"/>
   </p:sldIdLst>
   <p:sldSz cx="12192000" cy="6858000"/>
   <p:notesSz cx="6858000" cy="9144000"/>
@@ -105,6 +108,11 @@
       </a:defRPr>
     </a:lvl9pPr>
   </p:defaultTextStyle>
+  <p:extLst>
+    <p:ext uri="{EFAFB233-063F-42B5-8137-9DF3F51BA10A}">
+      <p15:sldGuideLst xmlns:p15="http://schemas.microsoft.com/office/powerpoint/2012/main"/>
+    </p:ext>
+  </p:extLst>
 </p:presentation>
 </file>
 
@@ -257,7 +265,7 @@
           <a:p>
             <a:fld id="{3427E477-3359-45F1-BD76-6786700BEEE7}" type="datetimeFigureOut">
               <a:rPr lang="en-IN" smtClean="0"/>
-              <a:t>18-06-2026</a:t>
+              <a:t>28-06-2026</a:t>
             </a:fld>
             <a:endParaRPr lang="en-IN"/>
           </a:p>
@@ -457,7 +465,7 @@
           <a:p>
             <a:fld id="{3427E477-3359-45F1-BD76-6786700BEEE7}" type="datetimeFigureOut">
               <a:rPr lang="en-IN" smtClean="0"/>
-              <a:t>18-06-2026</a:t>
+              <a:t>28-06-2026</a:t>
             </a:fld>
             <a:endParaRPr lang="en-IN"/>
           </a:p>
@@ -667,7 +675,7 @@
           <a:p>
             <a:fld id="{3427E477-3359-45F1-BD76-6786700BEEE7}" type="datetimeFigureOut">
               <a:rPr lang="en-IN" smtClean="0"/>
-              <a:t>18-06-2026</a:t>
+              <a:t>28-06-2026</a:t>
             </a:fld>
             <a:endParaRPr lang="en-IN"/>
           </a:p>
@@ -867,7 +875,7 @@
           <a:p>
             <a:fld id="{3427E477-3359-45F1-BD76-6786700BEEE7}" type="datetimeFigureOut">
               <a:rPr lang="en-IN" smtClean="0"/>
-              <a:t>18-06-2026</a:t>
+              <a:t>28-06-2026</a:t>
             </a:fld>
             <a:endParaRPr lang="en-IN"/>
           </a:p>
@@ -1143,7 +1151,7 @@
           <a:p>
             <a:fld id="{3427E477-3359-45F1-BD76-6786700BEEE7}" type="datetimeFigureOut">
               <a:rPr lang="en-IN" smtClean="0"/>
-              <a:t>18-06-2026</a:t>
+              <a:t>28-06-2026</a:t>
             </a:fld>
             <a:endParaRPr lang="en-IN"/>
           </a:p>
@@ -1411,7 +1419,7 @@
           <a:p>
             <a:fld id="{3427E477-3359-45F1-BD76-6786700BEEE7}" type="datetimeFigureOut">
               <a:rPr lang="en-IN" smtClean="0"/>
-              <a:t>18-06-2026</a:t>
+              <a:t>28-06-2026</a:t>
             </a:fld>
             <a:endParaRPr lang="en-IN"/>
           </a:p>
@@ -1826,7 +1834,7 @@
           <a:p>
             <a:fld id="{3427E477-3359-45F1-BD76-6786700BEEE7}" type="datetimeFigureOut">
               <a:rPr lang="en-IN" smtClean="0"/>
-              <a:t>18-06-2026</a:t>
+              <a:t>28-06-2026</a:t>
             </a:fld>
             <a:endParaRPr lang="en-IN"/>
           </a:p>
@@ -1968,7 +1976,7 @@
           <a:p>
             <a:fld id="{3427E477-3359-45F1-BD76-6786700BEEE7}" type="datetimeFigureOut">
               <a:rPr lang="en-IN" smtClean="0"/>
-              <a:t>18-06-2026</a:t>
+              <a:t>28-06-2026</a:t>
             </a:fld>
             <a:endParaRPr lang="en-IN"/>
           </a:p>
@@ -2081,7 +2089,7 @@
           <a:p>
             <a:fld id="{3427E477-3359-45F1-BD76-6786700BEEE7}" type="datetimeFigureOut">
               <a:rPr lang="en-IN" smtClean="0"/>
-              <a:t>18-06-2026</a:t>
+              <a:t>28-06-2026</a:t>
             </a:fld>
             <a:endParaRPr lang="en-IN"/>
           </a:p>
@@ -2394,7 +2402,7 @@
           <a:p>
             <a:fld id="{3427E477-3359-45F1-BD76-6786700BEEE7}" type="datetimeFigureOut">
               <a:rPr lang="en-IN" smtClean="0"/>
-              <a:t>18-06-2026</a:t>
+              <a:t>28-06-2026</a:t>
             </a:fld>
             <a:endParaRPr lang="en-IN"/>
           </a:p>
@@ -2683,7 +2691,7 @@
           <a:p>
             <a:fld id="{3427E477-3359-45F1-BD76-6786700BEEE7}" type="datetimeFigureOut">
               <a:rPr lang="en-IN" smtClean="0"/>
-              <a:t>18-06-2026</a:t>
+              <a:t>28-06-2026</a:t>
             </a:fld>
             <a:endParaRPr lang="en-IN"/>
           </a:p>
@@ -2926,7 +2934,7 @@
           <a:p>
             <a:fld id="{3427E477-3359-45F1-BD76-6786700BEEE7}" type="datetimeFigureOut">
               <a:rPr lang="en-IN" smtClean="0"/>
-              <a:t>18-06-2026</a:t>
+              <a:t>28-06-2026</a:t>
             </a:fld>
             <a:endParaRPr lang="en-IN"/>
           </a:p>
@@ -3728,6 +3736,2438 @@
 </p:sld>
 </file>
 
+<file path=ppt/slides/slide3.xml><?xml version="1.0" encoding="utf-8"?>
+<p:sld xmlns:a="http://schemas.openxmlformats.org/drawingml/2006/main" xmlns:r="http://schemas.openxmlformats.org/officeDocument/2006/relationships" xmlns:p="http://schemas.openxmlformats.org/presentationml/2006/main">
+  <p:cSld>
+    <p:spTree>
+      <p:nvGrpSpPr>
+        <p:cNvPr id="1" name=""/>
+        <p:cNvGrpSpPr/>
+        <p:nvPr/>
+      </p:nvGrpSpPr>
+      <p:grpSpPr>
+        <a:xfrm>
+          <a:off x="0" y="0"/>
+          <a:ext cx="0" cy="0"/>
+          <a:chOff x="0" y="0"/>
+          <a:chExt cx="0" cy="0"/>
+        </a:xfrm>
+      </p:grpSpPr>
+      <p:grpSp>
+        <p:nvGrpSpPr>
+          <p:cNvPr id="32" name="Group 31">
+            <a:extLst>
+              <a:ext uri="{FF2B5EF4-FFF2-40B4-BE49-F238E27FC236}">
+                <a16:creationId xmlns:a16="http://schemas.microsoft.com/office/drawing/2014/main" id="{8EDDAE83-D0E5-8BC6-8DE1-1402E58E47E2}"/>
+              </a:ext>
+            </a:extLst>
+          </p:cNvPr>
+          <p:cNvGrpSpPr/>
+          <p:nvPr/>
+        </p:nvGrpSpPr>
+        <p:grpSpPr>
+          <a:xfrm>
+            <a:off x="89873" y="2399060"/>
+            <a:ext cx="12370797" cy="2506362"/>
+            <a:chOff x="89873" y="2399060"/>
+            <a:chExt cx="12370797" cy="2506362"/>
+          </a:xfrm>
+        </p:grpSpPr>
+        <p:sp>
+          <p:nvSpPr>
+            <p:cNvPr id="7" name="TextBox 6">
+              <a:extLst>
+                <a:ext uri="{FF2B5EF4-FFF2-40B4-BE49-F238E27FC236}">
+                  <a16:creationId xmlns:a16="http://schemas.microsoft.com/office/drawing/2014/main" id="{BB01993C-3DDF-A9B2-2153-2CC6F0B441CE}"/>
+                </a:ext>
+              </a:extLst>
+            </p:cNvPr>
+            <p:cNvSpPr txBox="1"/>
+            <p:nvPr/>
+          </p:nvSpPr>
+          <p:spPr>
+            <a:xfrm rot="16200000">
+              <a:off x="-854756" y="3343689"/>
+              <a:ext cx="2150869" cy="261611"/>
+            </a:xfrm>
+            <a:prstGeom prst="rect">
+              <a:avLst/>
+            </a:prstGeom>
+            <a:noFill/>
+          </p:spPr>
+          <p:txBody>
+            <a:bodyPr wrap="square" rtlCol="0">
+              <a:spAutoFit/>
+            </a:bodyPr>
+            <a:lstStyle/>
+            <a:p>
+              <a:r>
+                <a:rPr lang="en-IN" sz="1050" dirty="0">
+                  <a:latin typeface="Arial Black" panose="020B0A04020102020204" pitchFamily="34" charset="0"/>
+                </a:rPr>
+                <a:t>Normalized Brenner score</a:t>
+              </a:r>
+            </a:p>
+          </p:txBody>
+        </p:sp>
+        <p:grpSp>
+          <p:nvGrpSpPr>
+            <p:cNvPr id="26" name="Group 25">
+              <a:extLst>
+                <a:ext uri="{FF2B5EF4-FFF2-40B4-BE49-F238E27FC236}">
+                  <a16:creationId xmlns:a16="http://schemas.microsoft.com/office/drawing/2014/main" id="{E7AFB046-45B9-9631-117D-ECEC25F83473}"/>
+                </a:ext>
+              </a:extLst>
+            </p:cNvPr>
+            <p:cNvGrpSpPr/>
+            <p:nvPr/>
+          </p:nvGrpSpPr>
+          <p:grpSpPr>
+            <a:xfrm>
+              <a:off x="351484" y="2492943"/>
+              <a:ext cx="12109186" cy="2412479"/>
+              <a:chOff x="351484" y="2492943"/>
+              <a:chExt cx="12109186" cy="2412479"/>
+            </a:xfrm>
+          </p:grpSpPr>
+          <p:grpSp>
+            <p:nvGrpSpPr>
+              <p:cNvPr id="16" name="Group 15">
+                <a:extLst>
+                  <a:ext uri="{FF2B5EF4-FFF2-40B4-BE49-F238E27FC236}">
+                    <a16:creationId xmlns:a16="http://schemas.microsoft.com/office/drawing/2014/main" id="{AD525618-679C-E62E-2C48-B2F73BCE3160}"/>
+                  </a:ext>
+                </a:extLst>
+              </p:cNvPr>
+              <p:cNvGrpSpPr/>
+              <p:nvPr/>
+            </p:nvGrpSpPr>
+            <p:grpSpPr>
+              <a:xfrm>
+                <a:off x="351484" y="2492943"/>
+                <a:ext cx="12109186" cy="2412479"/>
+                <a:chOff x="351484" y="2492943"/>
+                <a:chExt cx="12109186" cy="2412479"/>
+              </a:xfrm>
+            </p:grpSpPr>
+            <p:pic>
+              <p:nvPicPr>
+                <p:cNvPr id="6" name="Picture 5">
+                  <a:extLst>
+                    <a:ext uri="{FF2B5EF4-FFF2-40B4-BE49-F238E27FC236}">
+                      <a16:creationId xmlns:a16="http://schemas.microsoft.com/office/drawing/2014/main" id="{FA595982-92F9-91C7-A2DD-8C8713EE192B}"/>
+                    </a:ext>
+                  </a:extLst>
+                </p:cNvPr>
+                <p:cNvPicPr>
+                  <a:picLocks noChangeAspect="1"/>
+                </p:cNvPicPr>
+                <p:nvPr/>
+              </p:nvPicPr>
+              <p:blipFill>
+                <a:blip r:embed="rId2">
+                  <a:extLst>
+                    <a:ext uri="{28A0092B-C50C-407E-A947-70E740481C1C}">
+                      <a14:useLocalDpi xmlns:a14="http://schemas.microsoft.com/office/drawing/2010/main" val="0"/>
+                    </a:ext>
+                  </a:extLst>
+                </a:blip>
+                <a:srcRect l="68656" t="57035" b="3360"/>
+                <a:stretch>
+                  <a:fillRect/>
+                </a:stretch>
+              </p:blipFill>
+              <p:spPr>
+                <a:xfrm>
+                  <a:off x="9372674" y="2492943"/>
+                  <a:ext cx="3063851" cy="2150869"/>
+                </a:xfrm>
+                <a:prstGeom prst="rect">
+                  <a:avLst/>
+                </a:prstGeom>
+              </p:spPr>
+            </p:pic>
+            <p:pic>
+              <p:nvPicPr>
+                <p:cNvPr id="5" name="Picture 4">
+                  <a:extLst>
+                    <a:ext uri="{FF2B5EF4-FFF2-40B4-BE49-F238E27FC236}">
+                      <a16:creationId xmlns:a16="http://schemas.microsoft.com/office/drawing/2014/main" id="{CA472653-1527-64D2-239F-7DE59B0C34AD}"/>
+                    </a:ext>
+                  </a:extLst>
+                </p:cNvPr>
+                <p:cNvPicPr>
+                  <a:picLocks noChangeAspect="1"/>
+                </p:cNvPicPr>
+                <p:nvPr/>
+              </p:nvPicPr>
+              <p:blipFill>
+                <a:blip r:embed="rId2">
+                  <a:extLst>
+                    <a:ext uri="{28A0092B-C50C-407E-A947-70E740481C1C}">
+                      <a14:useLocalDpi xmlns:a14="http://schemas.microsoft.com/office/drawing/2010/main" val="0"/>
+                    </a:ext>
+                  </a:extLst>
+                </a:blip>
+                <a:srcRect l="68765" t="13851" r="692" b="46625"/>
+                <a:stretch>
+                  <a:fillRect/>
+                </a:stretch>
+              </p:blipFill>
+              <p:spPr>
+                <a:xfrm>
+                  <a:off x="6430091" y="2492943"/>
+                  <a:ext cx="2991743" cy="2150869"/>
+                </a:xfrm>
+                <a:prstGeom prst="rect">
+                  <a:avLst/>
+                </a:prstGeom>
+              </p:spPr>
+            </p:pic>
+            <p:pic>
+              <p:nvPicPr>
+                <p:cNvPr id="4" name="Picture 3">
+                  <a:extLst>
+                    <a:ext uri="{FF2B5EF4-FFF2-40B4-BE49-F238E27FC236}">
+                      <a16:creationId xmlns:a16="http://schemas.microsoft.com/office/drawing/2014/main" id="{E5D2C330-D9D5-329A-1658-B5DD25F371F0}"/>
+                    </a:ext>
+                  </a:extLst>
+                </p:cNvPr>
+                <p:cNvPicPr>
+                  <a:picLocks noChangeAspect="1"/>
+                </p:cNvPicPr>
+                <p:nvPr/>
+              </p:nvPicPr>
+              <p:blipFill>
+                <a:blip r:embed="rId2">
+                  <a:extLst>
+                    <a:ext uri="{28A0092B-C50C-407E-A947-70E740481C1C}">
+                      <a14:useLocalDpi xmlns:a14="http://schemas.microsoft.com/office/drawing/2010/main" val="0"/>
+                    </a:ext>
+                  </a:extLst>
+                </a:blip>
+                <a:srcRect l="35422" t="13688" r="33494" b="46625"/>
+                <a:stretch>
+                  <a:fillRect/>
+                </a:stretch>
+              </p:blipFill>
+              <p:spPr>
+                <a:xfrm>
+                  <a:off x="3474720" y="2492943"/>
+                  <a:ext cx="3032373" cy="2150869"/>
+                </a:xfrm>
+                <a:prstGeom prst="rect">
+                  <a:avLst/>
+                </a:prstGeom>
+              </p:spPr>
+            </p:pic>
+            <p:pic>
+              <p:nvPicPr>
+                <p:cNvPr id="3" name="Picture 2">
+                  <a:extLst>
+                    <a:ext uri="{FF2B5EF4-FFF2-40B4-BE49-F238E27FC236}">
+                      <a16:creationId xmlns:a16="http://schemas.microsoft.com/office/drawing/2014/main" id="{0F792700-4CB7-9460-43BB-BF53EDE19990}"/>
+                    </a:ext>
+                  </a:extLst>
+                </p:cNvPr>
+                <p:cNvPicPr>
+                  <a:picLocks noChangeAspect="1"/>
+                </p:cNvPicPr>
+                <p:nvPr/>
+              </p:nvPicPr>
+              <p:blipFill>
+                <a:blip r:embed="rId2">
+                  <a:extLst>
+                    <a:ext uri="{28A0092B-C50C-407E-A947-70E740481C1C}">
+                      <a14:useLocalDpi xmlns:a14="http://schemas.microsoft.com/office/drawing/2010/main" val="0"/>
+                    </a:ext>
+                  </a:extLst>
+                </a:blip>
+                <a:srcRect l="633" t="13688" r="66565" b="46788"/>
+                <a:stretch>
+                  <a:fillRect/>
+                </a:stretch>
+              </p:blipFill>
+              <p:spPr>
+                <a:xfrm>
+                  <a:off x="351484" y="2492943"/>
+                  <a:ext cx="3213026" cy="2150869"/>
+                </a:xfrm>
+                <a:prstGeom prst="rect">
+                  <a:avLst/>
+                </a:prstGeom>
+              </p:spPr>
+            </p:pic>
+            <p:sp>
+              <p:nvSpPr>
+                <p:cNvPr id="8" name="TextBox 7">
+                  <a:extLst>
+                    <a:ext uri="{FF2B5EF4-FFF2-40B4-BE49-F238E27FC236}">
+                      <a16:creationId xmlns:a16="http://schemas.microsoft.com/office/drawing/2014/main" id="{4B57DA7D-1DC1-4E78-55CA-570AFB7AF6C1}"/>
+                    </a:ext>
+                  </a:extLst>
+                </p:cNvPr>
+                <p:cNvSpPr txBox="1"/>
+                <p:nvPr/>
+              </p:nvSpPr>
+              <p:spPr>
+                <a:xfrm>
+                  <a:off x="1447809" y="4643812"/>
+                  <a:ext cx="2136808" cy="261610"/>
+                </a:xfrm>
+                <a:prstGeom prst="rect">
+                  <a:avLst/>
+                </a:prstGeom>
+                <a:noFill/>
+              </p:spPr>
+              <p:txBody>
+                <a:bodyPr wrap="square" rtlCol="0">
+                  <a:spAutoFit/>
+                </a:bodyPr>
+                <a:lstStyle/>
+                <a:p>
+                  <a:r>
+                    <a:rPr lang="en-IN" sz="1050" dirty="0">
+                      <a:latin typeface="Arial Black" panose="020B0A04020102020204" pitchFamily="34" charset="0"/>
+                    </a:rPr>
+                    <a:t>Defocus (um)</a:t>
+                  </a:r>
+                </a:p>
+              </p:txBody>
+            </p:sp>
+            <p:sp>
+              <p:nvSpPr>
+                <p:cNvPr id="9" name="TextBox 8">
+                  <a:extLst>
+                    <a:ext uri="{FF2B5EF4-FFF2-40B4-BE49-F238E27FC236}">
+                      <a16:creationId xmlns:a16="http://schemas.microsoft.com/office/drawing/2014/main" id="{65C58E3E-4010-5EBC-1183-707411918719}"/>
+                    </a:ext>
+                  </a:extLst>
+                </p:cNvPr>
+                <p:cNvSpPr txBox="1"/>
+                <p:nvPr/>
+              </p:nvSpPr>
+              <p:spPr>
+                <a:xfrm>
+                  <a:off x="4459659" y="4643812"/>
+                  <a:ext cx="2136808" cy="261610"/>
+                </a:xfrm>
+                <a:prstGeom prst="rect">
+                  <a:avLst/>
+                </a:prstGeom>
+                <a:noFill/>
+              </p:spPr>
+              <p:txBody>
+                <a:bodyPr wrap="square" rtlCol="0">
+                  <a:spAutoFit/>
+                </a:bodyPr>
+                <a:lstStyle/>
+                <a:p>
+                  <a:r>
+                    <a:rPr lang="en-IN" sz="1050" dirty="0">
+                      <a:latin typeface="Arial Black" panose="020B0A04020102020204" pitchFamily="34" charset="0"/>
+                    </a:rPr>
+                    <a:t>Defocus (um)</a:t>
+                  </a:r>
+                </a:p>
+              </p:txBody>
+            </p:sp>
+            <p:sp>
+              <p:nvSpPr>
+                <p:cNvPr id="10" name="TextBox 9">
+                  <a:extLst>
+                    <a:ext uri="{FF2B5EF4-FFF2-40B4-BE49-F238E27FC236}">
+                      <a16:creationId xmlns:a16="http://schemas.microsoft.com/office/drawing/2014/main" id="{63618428-D3B1-846F-45D9-E2849B3DB5C6}"/>
+                    </a:ext>
+                  </a:extLst>
+                </p:cNvPr>
+                <p:cNvSpPr txBox="1"/>
+                <p:nvPr/>
+              </p:nvSpPr>
+              <p:spPr>
+                <a:xfrm>
+                  <a:off x="7325240" y="4643812"/>
+                  <a:ext cx="2136808" cy="261610"/>
+                </a:xfrm>
+                <a:prstGeom prst="rect">
+                  <a:avLst/>
+                </a:prstGeom>
+                <a:noFill/>
+              </p:spPr>
+              <p:txBody>
+                <a:bodyPr wrap="square" rtlCol="0">
+                  <a:spAutoFit/>
+                </a:bodyPr>
+                <a:lstStyle/>
+                <a:p>
+                  <a:r>
+                    <a:rPr lang="en-IN" sz="1050" dirty="0">
+                      <a:latin typeface="Arial Black" panose="020B0A04020102020204" pitchFamily="34" charset="0"/>
+                    </a:rPr>
+                    <a:t>Defocus (um)</a:t>
+                  </a:r>
+                </a:p>
+              </p:txBody>
+            </p:sp>
+            <p:sp>
+              <p:nvSpPr>
+                <p:cNvPr id="11" name="TextBox 10">
+                  <a:extLst>
+                    <a:ext uri="{FF2B5EF4-FFF2-40B4-BE49-F238E27FC236}">
+                      <a16:creationId xmlns:a16="http://schemas.microsoft.com/office/drawing/2014/main" id="{D5E51804-24D9-2DF2-3706-05DA95EDE598}"/>
+                    </a:ext>
+                  </a:extLst>
+                </p:cNvPr>
+                <p:cNvSpPr txBox="1"/>
+                <p:nvPr/>
+              </p:nvSpPr>
+              <p:spPr>
+                <a:xfrm>
+                  <a:off x="10323862" y="4643812"/>
+                  <a:ext cx="2136808" cy="261610"/>
+                </a:xfrm>
+                <a:prstGeom prst="rect">
+                  <a:avLst/>
+                </a:prstGeom>
+                <a:noFill/>
+              </p:spPr>
+              <p:txBody>
+                <a:bodyPr wrap="square" rtlCol="0">
+                  <a:spAutoFit/>
+                </a:bodyPr>
+                <a:lstStyle/>
+                <a:p>
+                  <a:r>
+                    <a:rPr lang="en-IN" sz="1050" dirty="0">
+                      <a:latin typeface="Arial Black" panose="020B0A04020102020204" pitchFamily="34" charset="0"/>
+                    </a:rPr>
+                    <a:t>Defocus (um)</a:t>
+                  </a:r>
+                </a:p>
+              </p:txBody>
+            </p:sp>
+            <p:sp>
+              <p:nvSpPr>
+                <p:cNvPr id="12" name="TextBox 11">
+                  <a:extLst>
+                    <a:ext uri="{FF2B5EF4-FFF2-40B4-BE49-F238E27FC236}">
+                      <a16:creationId xmlns:a16="http://schemas.microsoft.com/office/drawing/2014/main" id="{052CF65C-A0F3-654C-423A-F354367D15DA}"/>
+                    </a:ext>
+                  </a:extLst>
+                </p:cNvPr>
+                <p:cNvSpPr txBox="1"/>
+                <p:nvPr/>
+              </p:nvSpPr>
+              <p:spPr>
+                <a:xfrm>
+                  <a:off x="2305992" y="2601040"/>
+                  <a:ext cx="1128514" cy="161583"/>
+                </a:xfrm>
+                <a:prstGeom prst="rect">
+                  <a:avLst/>
+                </a:prstGeom>
+                <a:noFill/>
+                <a:ln>
+                  <a:solidFill>
+                    <a:schemeClr val="tx1"/>
+                  </a:solidFill>
+                </a:ln>
+              </p:spPr>
+              <p:txBody>
+                <a:bodyPr wrap="none" lIns="0" tIns="0" rIns="0" bIns="0" rtlCol="0">
+                  <a:spAutoFit/>
+                </a:bodyPr>
+                <a:lstStyle/>
+                <a:p>
+                  <a:r>
+                    <a:rPr lang="en-IN" sz="1050" dirty="0">
+                      <a:solidFill>
+                        <a:schemeClr val="accent1">
+                          <a:lumMod val="75000"/>
+                        </a:schemeClr>
+                      </a:solidFill>
+                      <a:latin typeface="Arial Black" panose="020B0A04020102020204" pitchFamily="34" charset="0"/>
+                    </a:rPr>
+                    <a:t>Pure Amplitude</a:t>
+                  </a:r>
+                </a:p>
+              </p:txBody>
+            </p:sp>
+            <p:sp>
+              <p:nvSpPr>
+                <p:cNvPr id="13" name="TextBox 12">
+                  <a:extLst>
+                    <a:ext uri="{FF2B5EF4-FFF2-40B4-BE49-F238E27FC236}">
+                      <a16:creationId xmlns:a16="http://schemas.microsoft.com/office/drawing/2014/main" id="{35B11AA7-9EA1-2A5D-EBEA-151FA7ED44C6}"/>
+                    </a:ext>
+                  </a:extLst>
+                </p:cNvPr>
+                <p:cNvSpPr txBox="1"/>
+                <p:nvPr/>
+              </p:nvSpPr>
+              <p:spPr>
+                <a:xfrm>
+                  <a:off x="5053111" y="2601040"/>
+                  <a:ext cx="1376980" cy="161583"/>
+                </a:xfrm>
+                <a:prstGeom prst="rect">
+                  <a:avLst/>
+                </a:prstGeom>
+                <a:solidFill>
+                  <a:schemeClr val="bg1"/>
+                </a:solidFill>
+                <a:ln>
+                  <a:solidFill>
+                    <a:schemeClr val="tx1"/>
+                  </a:solidFill>
+                </a:ln>
+              </p:spPr>
+              <p:txBody>
+                <a:bodyPr wrap="none" lIns="0" tIns="0" rIns="0" bIns="0" rtlCol="0">
+                  <a:spAutoFit/>
+                </a:bodyPr>
+                <a:lstStyle/>
+                <a:p>
+                  <a:r>
+                    <a:rPr lang="en-IN" sz="1050" dirty="0">
+                      <a:solidFill>
+                        <a:schemeClr val="accent1">
+                          <a:lumMod val="75000"/>
+                        </a:schemeClr>
+                      </a:solidFill>
+                      <a:latin typeface="Arial Black" panose="020B0A04020102020204" pitchFamily="34" charset="0"/>
+                    </a:rPr>
+                    <a:t>Pure Phase (weak)</a:t>
+                  </a:r>
+                </a:p>
+              </p:txBody>
+            </p:sp>
+            <p:sp>
+              <p:nvSpPr>
+                <p:cNvPr id="14" name="TextBox 13">
+                  <a:extLst>
+                    <a:ext uri="{FF2B5EF4-FFF2-40B4-BE49-F238E27FC236}">
+                      <a16:creationId xmlns:a16="http://schemas.microsoft.com/office/drawing/2014/main" id="{FCB2FE43-77DE-248A-8A8B-36FFDEA0F8D1}"/>
+                    </a:ext>
+                  </a:extLst>
+                </p:cNvPr>
+                <p:cNvSpPr txBox="1"/>
+                <p:nvPr/>
+              </p:nvSpPr>
+              <p:spPr>
+                <a:xfrm>
+                  <a:off x="7925962" y="2601040"/>
+                  <a:ext cx="1450718" cy="161583"/>
+                </a:xfrm>
+                <a:prstGeom prst="rect">
+                  <a:avLst/>
+                </a:prstGeom>
+                <a:solidFill>
+                  <a:schemeClr val="bg1"/>
+                </a:solidFill>
+                <a:ln>
+                  <a:solidFill>
+                    <a:schemeClr val="tx1"/>
+                  </a:solidFill>
+                </a:ln>
+              </p:spPr>
+              <p:txBody>
+                <a:bodyPr wrap="none" lIns="0" tIns="0" rIns="0" bIns="0" rtlCol="0">
+                  <a:spAutoFit/>
+                </a:bodyPr>
+                <a:lstStyle/>
+                <a:p>
+                  <a:r>
+                    <a:rPr lang="en-IN" sz="1050" dirty="0">
+                      <a:solidFill>
+                        <a:schemeClr val="accent1">
+                          <a:lumMod val="75000"/>
+                        </a:schemeClr>
+                      </a:solidFill>
+                      <a:latin typeface="Arial Black" panose="020B0A04020102020204" pitchFamily="34" charset="0"/>
+                    </a:rPr>
+                    <a:t>Pure Phase (strong)</a:t>
+                  </a:r>
+                </a:p>
+              </p:txBody>
+            </p:sp>
+            <p:sp>
+              <p:nvSpPr>
+                <p:cNvPr id="15" name="TextBox 14">
+                  <a:extLst>
+                    <a:ext uri="{FF2B5EF4-FFF2-40B4-BE49-F238E27FC236}">
+                      <a16:creationId xmlns:a16="http://schemas.microsoft.com/office/drawing/2014/main" id="{BC0A6200-BF93-9025-CE85-C423D60F3FFC}"/>
+                    </a:ext>
+                  </a:extLst>
+                </p:cNvPr>
+                <p:cNvSpPr txBox="1"/>
+                <p:nvPr/>
+              </p:nvSpPr>
+              <p:spPr>
+                <a:xfrm>
+                  <a:off x="11114017" y="2601040"/>
+                  <a:ext cx="1173398" cy="161583"/>
+                </a:xfrm>
+                <a:prstGeom prst="rect">
+                  <a:avLst/>
+                </a:prstGeom>
+                <a:solidFill>
+                  <a:schemeClr val="bg1"/>
+                </a:solidFill>
+                <a:ln>
+                  <a:solidFill>
+                    <a:schemeClr val="tx1"/>
+                  </a:solidFill>
+                </a:ln>
+              </p:spPr>
+              <p:txBody>
+                <a:bodyPr wrap="none" lIns="0" tIns="0" rIns="0" bIns="0" rtlCol="0">
+                  <a:spAutoFit/>
+                </a:bodyPr>
+                <a:lstStyle/>
+                <a:p>
+                  <a:r>
+                    <a:rPr lang="en-IN" sz="1050" dirty="0">
+                      <a:solidFill>
+                        <a:schemeClr val="accent1">
+                          <a:lumMod val="75000"/>
+                        </a:schemeClr>
+                      </a:solidFill>
+                      <a:latin typeface="Arial Black" panose="020B0A04020102020204" pitchFamily="34" charset="0"/>
+                    </a:rPr>
+                    <a:t>Complex Object</a:t>
+                  </a:r>
+                </a:p>
+              </p:txBody>
+            </p:sp>
+          </p:grpSp>
+          <p:sp>
+            <p:nvSpPr>
+              <p:cNvPr id="17" name="Arrow: Right 16">
+                <a:extLst>
+                  <a:ext uri="{FF2B5EF4-FFF2-40B4-BE49-F238E27FC236}">
+                    <a16:creationId xmlns:a16="http://schemas.microsoft.com/office/drawing/2014/main" id="{757C26CA-8C23-6D6D-100B-B94AE3DB8A32}"/>
+                  </a:ext>
+                </a:extLst>
+              </p:cNvPr>
+              <p:cNvSpPr/>
+              <p:nvPr/>
+            </p:nvSpPr>
+            <p:spPr>
+              <a:xfrm rot="19594502">
+                <a:off x="1547220" y="2846267"/>
+                <a:ext cx="346510" cy="142594"/>
+              </a:xfrm>
+              <a:prstGeom prst="rightArrow">
+                <a:avLst/>
+              </a:prstGeom>
+              <a:solidFill>
+                <a:srgbClr val="FFC000"/>
+              </a:solidFill>
+              <a:ln>
+                <a:noFill/>
+              </a:ln>
+            </p:spPr>
+            <p:style>
+              <a:lnRef idx="2">
+                <a:schemeClr val="accent1">
+                  <a:shade val="15000"/>
+                </a:schemeClr>
+              </a:lnRef>
+              <a:fillRef idx="1">
+                <a:schemeClr val="accent1"/>
+              </a:fillRef>
+              <a:effectRef idx="0">
+                <a:schemeClr val="accent1"/>
+              </a:effectRef>
+              <a:fontRef idx="minor">
+                <a:schemeClr val="lt1"/>
+              </a:fontRef>
+            </p:style>
+            <p:txBody>
+              <a:bodyPr rtlCol="0" anchor="ctr"/>
+              <a:lstStyle/>
+              <a:p>
+                <a:pPr algn="ctr"/>
+                <a:endParaRPr lang="en-IN"/>
+              </a:p>
+            </p:txBody>
+          </p:sp>
+          <p:sp>
+            <p:nvSpPr>
+              <p:cNvPr id="18" name="TextBox 17">
+                <a:extLst>
+                  <a:ext uri="{FF2B5EF4-FFF2-40B4-BE49-F238E27FC236}">
+                    <a16:creationId xmlns:a16="http://schemas.microsoft.com/office/drawing/2014/main" id="{D39ACB06-D95B-02FD-0005-AF561ED3680A}"/>
+                  </a:ext>
+                </a:extLst>
+              </p:cNvPr>
+              <p:cNvSpPr txBox="1"/>
+              <p:nvPr/>
+            </p:nvSpPr>
+            <p:spPr>
+              <a:xfrm>
+                <a:off x="901886" y="2956741"/>
+                <a:ext cx="1476509" cy="461665"/>
+              </a:xfrm>
+              <a:prstGeom prst="rect">
+                <a:avLst/>
+              </a:prstGeom>
+              <a:noFill/>
+            </p:spPr>
+            <p:txBody>
+              <a:bodyPr wrap="square" rtlCol="0">
+                <a:spAutoFit/>
+              </a:bodyPr>
+              <a:lstStyle/>
+              <a:p>
+                <a:r>
+                  <a:rPr lang="en-IN" sz="1200" b="1" dirty="0">
+                    <a:solidFill>
+                      <a:schemeClr val="accent6">
+                        <a:lumMod val="75000"/>
+                      </a:schemeClr>
+                    </a:solidFill>
+                  </a:rPr>
+                  <a:t>Global </a:t>
+                </a:r>
+              </a:p>
+              <a:p>
+                <a:r>
+                  <a:rPr lang="en-IN" sz="1200" b="1" dirty="0">
+                    <a:solidFill>
+                      <a:schemeClr val="accent6">
+                        <a:lumMod val="75000"/>
+                      </a:schemeClr>
+                    </a:solidFill>
+                  </a:rPr>
+                  <a:t>maximum</a:t>
+                </a:r>
+              </a:p>
+            </p:txBody>
+          </p:sp>
+          <p:sp>
+            <p:nvSpPr>
+              <p:cNvPr id="19" name="Arrow: Right 18">
+                <a:extLst>
+                  <a:ext uri="{FF2B5EF4-FFF2-40B4-BE49-F238E27FC236}">
+                    <a16:creationId xmlns:a16="http://schemas.microsoft.com/office/drawing/2014/main" id="{6273059A-6C50-F08C-FD8F-E8011D3DC07F}"/>
+                  </a:ext>
+                </a:extLst>
+              </p:cNvPr>
+              <p:cNvSpPr/>
+              <p:nvPr/>
+            </p:nvSpPr>
+            <p:spPr>
+              <a:xfrm rot="1242917">
+                <a:off x="4535998" y="4018946"/>
+                <a:ext cx="346510" cy="142594"/>
+              </a:xfrm>
+              <a:prstGeom prst="rightArrow">
+                <a:avLst/>
+              </a:prstGeom>
+              <a:solidFill>
+                <a:srgbClr val="FFC000"/>
+              </a:solidFill>
+              <a:ln>
+                <a:noFill/>
+              </a:ln>
+            </p:spPr>
+            <p:style>
+              <a:lnRef idx="2">
+                <a:schemeClr val="accent1">
+                  <a:shade val="15000"/>
+                </a:schemeClr>
+              </a:lnRef>
+              <a:fillRef idx="1">
+                <a:schemeClr val="accent1"/>
+              </a:fillRef>
+              <a:effectRef idx="0">
+                <a:schemeClr val="accent1"/>
+              </a:effectRef>
+              <a:fontRef idx="minor">
+                <a:schemeClr val="lt1"/>
+              </a:fontRef>
+            </p:style>
+            <p:txBody>
+              <a:bodyPr rtlCol="0" anchor="ctr"/>
+              <a:lstStyle/>
+              <a:p>
+                <a:pPr algn="ctr"/>
+                <a:endParaRPr lang="en-IN"/>
+              </a:p>
+            </p:txBody>
+          </p:sp>
+          <p:sp>
+            <p:nvSpPr>
+              <p:cNvPr id="20" name="TextBox 19">
+                <a:extLst>
+                  <a:ext uri="{FF2B5EF4-FFF2-40B4-BE49-F238E27FC236}">
+                    <a16:creationId xmlns:a16="http://schemas.microsoft.com/office/drawing/2014/main" id="{950C69B1-A172-DF5F-5B8F-5D9DC7C8BBFA}"/>
+                  </a:ext>
+                </a:extLst>
+              </p:cNvPr>
+              <p:cNvSpPr txBox="1"/>
+              <p:nvPr/>
+            </p:nvSpPr>
+            <p:spPr>
+              <a:xfrm>
+                <a:off x="3721404" y="3673179"/>
+                <a:ext cx="800575" cy="461665"/>
+              </a:xfrm>
+              <a:prstGeom prst="rect">
+                <a:avLst/>
+              </a:prstGeom>
+              <a:noFill/>
+            </p:spPr>
+            <p:txBody>
+              <a:bodyPr wrap="square" rtlCol="0">
+                <a:spAutoFit/>
+              </a:bodyPr>
+              <a:lstStyle/>
+              <a:p>
+                <a:r>
+                  <a:rPr lang="en-IN" sz="1200" b="1" dirty="0">
+                    <a:solidFill>
+                      <a:schemeClr val="accent6">
+                        <a:lumMod val="75000"/>
+                      </a:schemeClr>
+                    </a:solidFill>
+                  </a:rPr>
+                  <a:t>Global </a:t>
+                </a:r>
+              </a:p>
+              <a:p>
+                <a:r>
+                  <a:rPr lang="en-IN" sz="1200" b="1" dirty="0">
+                    <a:solidFill>
+                      <a:schemeClr val="accent6">
+                        <a:lumMod val="75000"/>
+                      </a:schemeClr>
+                    </a:solidFill>
+                  </a:rPr>
+                  <a:t>minimum</a:t>
+                </a:r>
+              </a:p>
+            </p:txBody>
+          </p:sp>
+          <p:sp>
+            <p:nvSpPr>
+              <p:cNvPr id="21" name="Arrow: Right 20">
+                <a:extLst>
+                  <a:ext uri="{FF2B5EF4-FFF2-40B4-BE49-F238E27FC236}">
+                    <a16:creationId xmlns:a16="http://schemas.microsoft.com/office/drawing/2014/main" id="{1526BF0E-5DEE-75A6-DD56-D7E86B3FB0BE}"/>
+                  </a:ext>
+                </a:extLst>
+              </p:cNvPr>
+              <p:cNvSpPr/>
+              <p:nvPr/>
+            </p:nvSpPr>
+            <p:spPr>
+              <a:xfrm rot="790287">
+                <a:off x="7318378" y="3855739"/>
+                <a:ext cx="472502" cy="148559"/>
+              </a:xfrm>
+              <a:prstGeom prst="rightArrow">
+                <a:avLst/>
+              </a:prstGeom>
+              <a:solidFill>
+                <a:srgbClr val="FFC000"/>
+              </a:solidFill>
+              <a:ln>
+                <a:noFill/>
+              </a:ln>
+            </p:spPr>
+            <p:style>
+              <a:lnRef idx="2">
+                <a:schemeClr val="accent1">
+                  <a:shade val="15000"/>
+                </a:schemeClr>
+              </a:lnRef>
+              <a:fillRef idx="1">
+                <a:schemeClr val="accent1"/>
+              </a:fillRef>
+              <a:effectRef idx="0">
+                <a:schemeClr val="accent1"/>
+              </a:effectRef>
+              <a:fontRef idx="minor">
+                <a:schemeClr val="lt1"/>
+              </a:fontRef>
+            </p:style>
+            <p:txBody>
+              <a:bodyPr rtlCol="0" anchor="ctr"/>
+              <a:lstStyle/>
+              <a:p>
+                <a:pPr algn="ctr"/>
+                <a:endParaRPr lang="en-IN"/>
+              </a:p>
+            </p:txBody>
+          </p:sp>
+          <p:sp>
+            <p:nvSpPr>
+              <p:cNvPr id="22" name="TextBox 21">
+                <a:extLst>
+                  <a:ext uri="{FF2B5EF4-FFF2-40B4-BE49-F238E27FC236}">
+                    <a16:creationId xmlns:a16="http://schemas.microsoft.com/office/drawing/2014/main" id="{34290599-AF02-7CEA-4382-EF79BAF838BC}"/>
+                  </a:ext>
+                </a:extLst>
+              </p:cNvPr>
+              <p:cNvSpPr txBox="1"/>
+              <p:nvPr/>
+            </p:nvSpPr>
+            <p:spPr>
+              <a:xfrm>
+                <a:off x="6507093" y="3765511"/>
+                <a:ext cx="1041974" cy="276999"/>
+              </a:xfrm>
+              <a:prstGeom prst="rect">
+                <a:avLst/>
+              </a:prstGeom>
+              <a:noFill/>
+            </p:spPr>
+            <p:txBody>
+              <a:bodyPr wrap="square" rtlCol="0">
+                <a:spAutoFit/>
+              </a:bodyPr>
+              <a:lstStyle/>
+              <a:p>
+                <a:r>
+                  <a:rPr lang="en-IN" sz="1200" b="1" dirty="0">
+                    <a:solidFill>
+                      <a:schemeClr val="accent6">
+                        <a:lumMod val="75000"/>
+                      </a:schemeClr>
+                    </a:solidFill>
+                  </a:rPr>
+                  <a:t>False peak</a:t>
+                </a:r>
+              </a:p>
+            </p:txBody>
+          </p:sp>
+          <p:sp>
+            <p:nvSpPr>
+              <p:cNvPr id="23" name="Arrow: Right 22">
+                <a:extLst>
+                  <a:ext uri="{FF2B5EF4-FFF2-40B4-BE49-F238E27FC236}">
+                    <a16:creationId xmlns:a16="http://schemas.microsoft.com/office/drawing/2014/main" id="{A4652BBE-9A11-CC94-F72C-43166C58E6DD}"/>
+                  </a:ext>
+                </a:extLst>
+              </p:cNvPr>
+              <p:cNvSpPr/>
+              <p:nvPr/>
+            </p:nvSpPr>
+            <p:spPr>
+              <a:xfrm rot="5400000">
+                <a:off x="9782127" y="3357703"/>
+                <a:ext cx="346510" cy="142594"/>
+              </a:xfrm>
+              <a:prstGeom prst="rightArrow">
+                <a:avLst/>
+              </a:prstGeom>
+              <a:solidFill>
+                <a:srgbClr val="FFC000"/>
+              </a:solidFill>
+              <a:ln>
+                <a:noFill/>
+              </a:ln>
+            </p:spPr>
+            <p:style>
+              <a:lnRef idx="2">
+                <a:schemeClr val="accent1">
+                  <a:shade val="15000"/>
+                </a:schemeClr>
+              </a:lnRef>
+              <a:fillRef idx="1">
+                <a:schemeClr val="accent1"/>
+              </a:fillRef>
+              <a:effectRef idx="0">
+                <a:schemeClr val="accent1"/>
+              </a:effectRef>
+              <a:fontRef idx="minor">
+                <a:schemeClr val="lt1"/>
+              </a:fontRef>
+            </p:style>
+            <p:txBody>
+              <a:bodyPr rtlCol="0" anchor="ctr"/>
+              <a:lstStyle/>
+              <a:p>
+                <a:pPr algn="ctr"/>
+                <a:endParaRPr lang="en-IN" dirty="0"/>
+              </a:p>
+            </p:txBody>
+          </p:sp>
+          <p:sp>
+            <p:nvSpPr>
+              <p:cNvPr id="24" name="Arrow: Right 23">
+                <a:extLst>
+                  <a:ext uri="{FF2B5EF4-FFF2-40B4-BE49-F238E27FC236}">
+                    <a16:creationId xmlns:a16="http://schemas.microsoft.com/office/drawing/2014/main" id="{50D09C6C-8440-BAC3-E816-23925494F064}"/>
+                  </a:ext>
+                </a:extLst>
+              </p:cNvPr>
+              <p:cNvSpPr/>
+              <p:nvPr/>
+            </p:nvSpPr>
+            <p:spPr>
+              <a:xfrm rot="5400000">
+                <a:off x="11424507" y="3363656"/>
+                <a:ext cx="346510" cy="142594"/>
+              </a:xfrm>
+              <a:prstGeom prst="rightArrow">
+                <a:avLst/>
+              </a:prstGeom>
+              <a:solidFill>
+                <a:srgbClr val="FFC000"/>
+              </a:solidFill>
+              <a:ln>
+                <a:noFill/>
+              </a:ln>
+            </p:spPr>
+            <p:style>
+              <a:lnRef idx="2">
+                <a:schemeClr val="accent1">
+                  <a:shade val="15000"/>
+                </a:schemeClr>
+              </a:lnRef>
+              <a:fillRef idx="1">
+                <a:schemeClr val="accent1"/>
+              </a:fillRef>
+              <a:effectRef idx="0">
+                <a:schemeClr val="accent1"/>
+              </a:effectRef>
+              <a:fontRef idx="minor">
+                <a:schemeClr val="lt1"/>
+              </a:fontRef>
+            </p:style>
+            <p:txBody>
+              <a:bodyPr rtlCol="0" anchor="ctr"/>
+              <a:lstStyle/>
+              <a:p>
+                <a:pPr algn="ctr"/>
+                <a:endParaRPr lang="en-IN"/>
+              </a:p>
+            </p:txBody>
+          </p:sp>
+          <p:sp>
+            <p:nvSpPr>
+              <p:cNvPr id="25" name="TextBox 24">
+                <a:extLst>
+                  <a:ext uri="{FF2B5EF4-FFF2-40B4-BE49-F238E27FC236}">
+                    <a16:creationId xmlns:a16="http://schemas.microsoft.com/office/drawing/2014/main" id="{107BC1F0-0A6B-7AB5-2B4C-71DFB8D6E1B3}"/>
+                  </a:ext>
+                </a:extLst>
+              </p:cNvPr>
+              <p:cNvSpPr txBox="1"/>
+              <p:nvPr/>
+            </p:nvSpPr>
+            <p:spPr>
+              <a:xfrm>
+                <a:off x="9630329" y="2917564"/>
+                <a:ext cx="1041974" cy="276999"/>
+              </a:xfrm>
+              <a:prstGeom prst="rect">
+                <a:avLst/>
+              </a:prstGeom>
+              <a:noFill/>
+            </p:spPr>
+            <p:txBody>
+              <a:bodyPr wrap="square" rtlCol="0">
+                <a:spAutoFit/>
+              </a:bodyPr>
+              <a:lstStyle/>
+              <a:p>
+                <a:r>
+                  <a:rPr lang="en-IN" sz="1200" b="1" dirty="0">
+                    <a:solidFill>
+                      <a:schemeClr val="accent6">
+                        <a:lumMod val="75000"/>
+                      </a:schemeClr>
+                    </a:solidFill>
+                  </a:rPr>
+                  <a:t>Asymmetry</a:t>
+                </a:r>
+              </a:p>
+            </p:txBody>
+          </p:sp>
+        </p:grpSp>
+      </p:grpSp>
+      <p:sp>
+        <p:nvSpPr>
+          <p:cNvPr id="28" name="TextBox 27">
+            <a:extLst>
+              <a:ext uri="{FF2B5EF4-FFF2-40B4-BE49-F238E27FC236}">
+                <a16:creationId xmlns:a16="http://schemas.microsoft.com/office/drawing/2014/main" id="{68DF57B4-59D7-A311-3B30-2A5F446E234D}"/>
+              </a:ext>
+            </a:extLst>
+          </p:cNvPr>
+          <p:cNvSpPr txBox="1"/>
+          <p:nvPr/>
+        </p:nvSpPr>
+        <p:spPr>
+          <a:xfrm>
+            <a:off x="596160" y="2548232"/>
+            <a:ext cx="462013" cy="369332"/>
+          </a:xfrm>
+          <a:prstGeom prst="rect">
+            <a:avLst/>
+          </a:prstGeom>
+          <a:noFill/>
+        </p:spPr>
+        <p:txBody>
+          <a:bodyPr wrap="square" rtlCol="0">
+            <a:spAutoFit/>
+          </a:bodyPr>
+          <a:lstStyle/>
+          <a:p>
+            <a:r>
+              <a:rPr lang="en-IN" b="1" dirty="0">
+                <a:solidFill>
+                  <a:srgbClr val="002060"/>
+                </a:solidFill>
+              </a:rPr>
+              <a:t>A</a:t>
+            </a:r>
+          </a:p>
+        </p:txBody>
+      </p:sp>
+      <p:sp>
+        <p:nvSpPr>
+          <p:cNvPr id="29" name="TextBox 28">
+            <a:extLst>
+              <a:ext uri="{FF2B5EF4-FFF2-40B4-BE49-F238E27FC236}">
+                <a16:creationId xmlns:a16="http://schemas.microsoft.com/office/drawing/2014/main" id="{17BA77EB-EB6C-CE64-7D30-51A979ABC6B6}"/>
+              </a:ext>
+            </a:extLst>
+          </p:cNvPr>
+          <p:cNvSpPr txBox="1"/>
+          <p:nvPr/>
+        </p:nvSpPr>
+        <p:spPr>
+          <a:xfrm>
+            <a:off x="3562650" y="2548232"/>
+            <a:ext cx="350335" cy="369332"/>
+          </a:xfrm>
+          <a:prstGeom prst="rect">
+            <a:avLst/>
+          </a:prstGeom>
+          <a:solidFill>
+            <a:schemeClr val="bg1"/>
+          </a:solidFill>
+        </p:spPr>
+        <p:txBody>
+          <a:bodyPr wrap="square" rtlCol="0">
+            <a:spAutoFit/>
+          </a:bodyPr>
+          <a:lstStyle/>
+          <a:p>
+            <a:r>
+              <a:rPr lang="en-IN" b="1" dirty="0">
+                <a:solidFill>
+                  <a:srgbClr val="002060"/>
+                </a:solidFill>
+              </a:rPr>
+              <a:t>B</a:t>
+            </a:r>
+          </a:p>
+        </p:txBody>
+      </p:sp>
+      <p:sp>
+        <p:nvSpPr>
+          <p:cNvPr id="30" name="TextBox 29">
+            <a:extLst>
+              <a:ext uri="{FF2B5EF4-FFF2-40B4-BE49-F238E27FC236}">
+                <a16:creationId xmlns:a16="http://schemas.microsoft.com/office/drawing/2014/main" id="{B125450D-D9B2-6172-0C0D-ADDF48F8DFAA}"/>
+              </a:ext>
+            </a:extLst>
+          </p:cNvPr>
+          <p:cNvSpPr txBox="1"/>
+          <p:nvPr/>
+        </p:nvSpPr>
+        <p:spPr>
+          <a:xfrm>
+            <a:off x="6502577" y="2548232"/>
+            <a:ext cx="350335" cy="369332"/>
+          </a:xfrm>
+          <a:prstGeom prst="rect">
+            <a:avLst/>
+          </a:prstGeom>
+          <a:solidFill>
+            <a:schemeClr val="bg1"/>
+          </a:solidFill>
+        </p:spPr>
+        <p:txBody>
+          <a:bodyPr wrap="square" rtlCol="0">
+            <a:spAutoFit/>
+          </a:bodyPr>
+          <a:lstStyle/>
+          <a:p>
+            <a:r>
+              <a:rPr lang="en-IN" b="1" dirty="0">
+                <a:solidFill>
+                  <a:srgbClr val="002060"/>
+                </a:solidFill>
+              </a:rPr>
+              <a:t>C</a:t>
+            </a:r>
+          </a:p>
+        </p:txBody>
+      </p:sp>
+      <p:sp>
+        <p:nvSpPr>
+          <p:cNvPr id="31" name="TextBox 30">
+            <a:extLst>
+              <a:ext uri="{FF2B5EF4-FFF2-40B4-BE49-F238E27FC236}">
+                <a16:creationId xmlns:a16="http://schemas.microsoft.com/office/drawing/2014/main" id="{772E0048-F248-E90B-9795-D8ABA8932869}"/>
+              </a:ext>
+            </a:extLst>
+          </p:cNvPr>
+          <p:cNvSpPr txBox="1"/>
+          <p:nvPr/>
+        </p:nvSpPr>
+        <p:spPr>
+          <a:xfrm>
+            <a:off x="9432856" y="2548232"/>
+            <a:ext cx="350335" cy="369332"/>
+          </a:xfrm>
+          <a:prstGeom prst="rect">
+            <a:avLst/>
+          </a:prstGeom>
+          <a:solidFill>
+            <a:schemeClr val="bg1"/>
+          </a:solidFill>
+        </p:spPr>
+        <p:txBody>
+          <a:bodyPr wrap="square" rtlCol="0">
+            <a:spAutoFit/>
+          </a:bodyPr>
+          <a:lstStyle/>
+          <a:p>
+            <a:r>
+              <a:rPr lang="en-IN" b="1" dirty="0">
+                <a:solidFill>
+                  <a:srgbClr val="002060"/>
+                </a:solidFill>
+              </a:rPr>
+              <a:t>D</a:t>
+            </a:r>
+          </a:p>
+        </p:txBody>
+      </p:sp>
+    </p:spTree>
+    <p:extLst>
+      <p:ext uri="{BB962C8B-B14F-4D97-AF65-F5344CB8AC3E}">
+        <p14:creationId xmlns:p14="http://schemas.microsoft.com/office/powerpoint/2010/main" val="2001283386"/>
+      </p:ext>
+    </p:extLst>
+  </p:cSld>
+  <p:clrMapOvr>
+    <a:masterClrMapping/>
+  </p:clrMapOvr>
+</p:sld>
+</file>
+
+<file path=ppt/slides/slide4.xml><?xml version="1.0" encoding="utf-8"?>
+<p:sld xmlns:a="http://schemas.openxmlformats.org/drawingml/2006/main" xmlns:r="http://schemas.openxmlformats.org/officeDocument/2006/relationships" xmlns:p="http://schemas.openxmlformats.org/presentationml/2006/main">
+  <p:cSld>
+    <p:spTree>
+      <p:nvGrpSpPr>
+        <p:cNvPr id="1" name="">
+          <a:extLst>
+            <a:ext uri="{FF2B5EF4-FFF2-40B4-BE49-F238E27FC236}">
+              <a16:creationId xmlns:a16="http://schemas.microsoft.com/office/drawing/2014/main" id="{1EF07C58-FD41-F6EB-0FC0-4284B03D9012}"/>
+            </a:ext>
+          </a:extLst>
+        </p:cNvPr>
+        <p:cNvGrpSpPr/>
+        <p:nvPr/>
+      </p:nvGrpSpPr>
+      <p:grpSpPr>
+        <a:xfrm>
+          <a:off x="0" y="0"/>
+          <a:ext cx="0" cy="0"/>
+          <a:chOff x="0" y="0"/>
+          <a:chExt cx="0" cy="0"/>
+        </a:xfrm>
+      </p:grpSpPr>
+      <p:grpSp>
+        <p:nvGrpSpPr>
+          <p:cNvPr id="49" name="Group 48">
+            <a:extLst>
+              <a:ext uri="{FF2B5EF4-FFF2-40B4-BE49-F238E27FC236}">
+                <a16:creationId xmlns:a16="http://schemas.microsoft.com/office/drawing/2014/main" id="{5821C92A-EEF7-651A-D127-BB592EF9D99E}"/>
+              </a:ext>
+            </a:extLst>
+          </p:cNvPr>
+          <p:cNvGrpSpPr/>
+          <p:nvPr/>
+        </p:nvGrpSpPr>
+        <p:grpSpPr>
+          <a:xfrm>
+            <a:off x="123412" y="1561662"/>
+            <a:ext cx="12735783" cy="2650515"/>
+            <a:chOff x="123412" y="1561662"/>
+            <a:chExt cx="12735783" cy="2650515"/>
+          </a:xfrm>
+        </p:grpSpPr>
+        <p:grpSp>
+          <p:nvGrpSpPr>
+            <p:cNvPr id="7" name="Group 6">
+              <a:extLst>
+                <a:ext uri="{FF2B5EF4-FFF2-40B4-BE49-F238E27FC236}">
+                  <a16:creationId xmlns:a16="http://schemas.microsoft.com/office/drawing/2014/main" id="{A0610166-1902-99AA-E934-C4633B18D0E5}"/>
+                </a:ext>
+              </a:extLst>
+            </p:cNvPr>
+            <p:cNvGrpSpPr/>
+            <p:nvPr/>
+          </p:nvGrpSpPr>
+          <p:grpSpPr>
+            <a:xfrm>
+              <a:off x="293943" y="1848051"/>
+              <a:ext cx="12340819" cy="2215218"/>
+              <a:chOff x="37386" y="2801072"/>
+              <a:chExt cx="12951651" cy="2417229"/>
+            </a:xfrm>
+          </p:grpSpPr>
+          <p:pic>
+            <p:nvPicPr>
+              <p:cNvPr id="3" name="Picture 2">
+                <a:extLst>
+                  <a:ext uri="{FF2B5EF4-FFF2-40B4-BE49-F238E27FC236}">
+                    <a16:creationId xmlns:a16="http://schemas.microsoft.com/office/drawing/2014/main" id="{BF2D0D93-25CE-B4CA-412D-B56261B5F217}"/>
+                  </a:ext>
+                </a:extLst>
+              </p:cNvPr>
+              <p:cNvPicPr>
+                <a:picLocks noChangeAspect="1"/>
+              </p:cNvPicPr>
+              <p:nvPr/>
+            </p:nvPicPr>
+            <p:blipFill>
+              <a:blip r:embed="rId2">
+                <a:extLst>
+                  <a:ext uri="{28A0092B-C50C-407E-A947-70E740481C1C}">
+                    <a14:useLocalDpi xmlns:a14="http://schemas.microsoft.com/office/drawing/2010/main" val="0"/>
+                  </a:ext>
+                </a:extLst>
+              </a:blip>
+              <a:srcRect l="69176" t="57425" r="824" b="1392"/>
+              <a:stretch>
+                <a:fillRect/>
+              </a:stretch>
+            </p:blipFill>
+            <p:spPr>
+              <a:xfrm>
+                <a:off x="9819558" y="2801072"/>
+                <a:ext cx="3169479" cy="2417229"/>
+              </a:xfrm>
+              <a:prstGeom prst="rect">
+                <a:avLst/>
+              </a:prstGeom>
+            </p:spPr>
+          </p:pic>
+          <p:pic>
+            <p:nvPicPr>
+              <p:cNvPr id="4" name="Picture 3">
+                <a:extLst>
+                  <a:ext uri="{FF2B5EF4-FFF2-40B4-BE49-F238E27FC236}">
+                    <a16:creationId xmlns:a16="http://schemas.microsoft.com/office/drawing/2014/main" id="{37727AB4-67D2-32E3-810A-D7A8AE068B37}"/>
+                  </a:ext>
+                </a:extLst>
+              </p:cNvPr>
+              <p:cNvPicPr>
+                <a:picLocks noChangeAspect="1"/>
+              </p:cNvPicPr>
+              <p:nvPr/>
+            </p:nvPicPr>
+            <p:blipFill>
+              <a:blip r:embed="rId2">
+                <a:extLst>
+                  <a:ext uri="{28A0092B-C50C-407E-A947-70E740481C1C}">
+                    <a14:useLocalDpi xmlns:a14="http://schemas.microsoft.com/office/drawing/2010/main" val="0"/>
+                  </a:ext>
+                </a:extLst>
+              </a:blip>
+              <a:srcRect t="13992" r="66866" b="46847"/>
+              <a:stretch>
+                <a:fillRect/>
+              </a:stretch>
+            </p:blipFill>
+            <p:spPr>
+              <a:xfrm>
+                <a:off x="37386" y="2801072"/>
+                <a:ext cx="3500609" cy="2298540"/>
+              </a:xfrm>
+              <a:prstGeom prst="rect">
+                <a:avLst/>
+              </a:prstGeom>
+            </p:spPr>
+          </p:pic>
+          <p:pic>
+            <p:nvPicPr>
+              <p:cNvPr id="6" name="Picture 5">
+                <a:extLst>
+                  <a:ext uri="{FF2B5EF4-FFF2-40B4-BE49-F238E27FC236}">
+                    <a16:creationId xmlns:a16="http://schemas.microsoft.com/office/drawing/2014/main" id="{4AEEC01D-941E-91DB-84C2-7CE02E4D47B3}"/>
+                  </a:ext>
+                </a:extLst>
+              </p:cNvPr>
+              <p:cNvPicPr>
+                <a:picLocks noChangeAspect="1"/>
+              </p:cNvPicPr>
+              <p:nvPr/>
+            </p:nvPicPr>
+            <p:blipFill>
+              <a:blip r:embed="rId2">
+                <a:extLst>
+                  <a:ext uri="{28A0092B-C50C-407E-A947-70E740481C1C}">
+                    <a14:useLocalDpi xmlns:a14="http://schemas.microsoft.com/office/drawing/2010/main" val="0"/>
+                  </a:ext>
+                </a:extLst>
+              </a:blip>
+              <a:srcRect l="68856" t="14163" r="790" b="46676"/>
+              <a:stretch>
+                <a:fillRect/>
+              </a:stretch>
+            </p:blipFill>
+            <p:spPr>
+              <a:xfrm>
+                <a:off x="6650079" y="2801072"/>
+                <a:ext cx="3206865" cy="2298540"/>
+              </a:xfrm>
+              <a:prstGeom prst="rect">
+                <a:avLst/>
+              </a:prstGeom>
+            </p:spPr>
+          </p:pic>
+          <p:pic>
+            <p:nvPicPr>
+              <p:cNvPr id="5" name="Picture 4">
+                <a:extLst>
+                  <a:ext uri="{FF2B5EF4-FFF2-40B4-BE49-F238E27FC236}">
+                    <a16:creationId xmlns:a16="http://schemas.microsoft.com/office/drawing/2014/main" id="{67E9FD3E-2344-4253-3DB3-C7983C101CF7}"/>
+                  </a:ext>
+                </a:extLst>
+              </p:cNvPr>
+              <p:cNvPicPr>
+                <a:picLocks noChangeAspect="1"/>
+              </p:cNvPicPr>
+              <p:nvPr/>
+            </p:nvPicPr>
+            <p:blipFill>
+              <a:blip r:embed="rId2">
+                <a:extLst>
+                  <a:ext uri="{28A0092B-C50C-407E-A947-70E740481C1C}">
+                    <a14:useLocalDpi xmlns:a14="http://schemas.microsoft.com/office/drawing/2010/main" val="0"/>
+                  </a:ext>
+                </a:extLst>
+              </a:blip>
+              <a:srcRect l="35982" t="14162" r="33642" b="46677"/>
+              <a:stretch>
+                <a:fillRect/>
+              </a:stretch>
+            </p:blipFill>
+            <p:spPr>
+              <a:xfrm>
+                <a:off x="3500609" y="2801072"/>
+                <a:ext cx="3206865" cy="2298540"/>
+              </a:xfrm>
+              <a:prstGeom prst="rect">
+                <a:avLst/>
+              </a:prstGeom>
+            </p:spPr>
+          </p:pic>
+        </p:grpSp>
+        <p:sp>
+          <p:nvSpPr>
+            <p:cNvPr id="13" name="TextBox 12">
+              <a:extLst>
+                <a:ext uri="{FF2B5EF4-FFF2-40B4-BE49-F238E27FC236}">
+                  <a16:creationId xmlns:a16="http://schemas.microsoft.com/office/drawing/2014/main" id="{36645D4A-3E0E-4A45-7251-F6159F34AEFB}"/>
+                </a:ext>
+              </a:extLst>
+            </p:cNvPr>
+            <p:cNvSpPr txBox="1"/>
+            <p:nvPr/>
+          </p:nvSpPr>
+          <p:spPr>
+            <a:xfrm rot="16200000">
+              <a:off x="-821217" y="2506291"/>
+              <a:ext cx="2150869" cy="261611"/>
+            </a:xfrm>
+            <a:prstGeom prst="rect">
+              <a:avLst/>
+            </a:prstGeom>
+            <a:noFill/>
+          </p:spPr>
+          <p:txBody>
+            <a:bodyPr wrap="square" rtlCol="0">
+              <a:spAutoFit/>
+            </a:bodyPr>
+            <a:lstStyle/>
+            <a:p>
+              <a:r>
+                <a:rPr lang="en-IN" sz="1050" dirty="0">
+                  <a:latin typeface="Arial" panose="020B0604020202020204" pitchFamily="34" charset="0"/>
+                  <a:cs typeface="Arial" panose="020B0604020202020204" pitchFamily="34" charset="0"/>
+                </a:rPr>
+                <a:t>Normalized Brenner score</a:t>
+              </a:r>
+            </a:p>
+          </p:txBody>
+        </p:sp>
+        <p:sp>
+          <p:nvSpPr>
+            <p:cNvPr id="14" name="TextBox 13">
+              <a:extLst>
+                <a:ext uri="{FF2B5EF4-FFF2-40B4-BE49-F238E27FC236}">
+                  <a16:creationId xmlns:a16="http://schemas.microsoft.com/office/drawing/2014/main" id="{9C4CD89F-7AB6-9ACE-2A5F-81E583665411}"/>
+                </a:ext>
+              </a:extLst>
+            </p:cNvPr>
+            <p:cNvSpPr txBox="1"/>
+            <p:nvPr/>
+          </p:nvSpPr>
+          <p:spPr>
+            <a:xfrm>
+              <a:off x="1647064" y="3932464"/>
+              <a:ext cx="2136808" cy="261610"/>
+            </a:xfrm>
+            <a:prstGeom prst="rect">
+              <a:avLst/>
+            </a:prstGeom>
+            <a:noFill/>
+          </p:spPr>
+          <p:txBody>
+            <a:bodyPr wrap="square" rtlCol="0">
+              <a:spAutoFit/>
+            </a:bodyPr>
+            <a:lstStyle/>
+            <a:p>
+              <a:r>
+                <a:rPr lang="en-IN" sz="1050" dirty="0">
+                  <a:latin typeface="Arial" panose="020B0604020202020204" pitchFamily="34" charset="0"/>
+                  <a:cs typeface="Arial" panose="020B0604020202020204" pitchFamily="34" charset="0"/>
+                </a:rPr>
+                <a:t>Defocus (µm)</a:t>
+              </a:r>
+            </a:p>
+          </p:txBody>
+        </p:sp>
+        <p:sp>
+          <p:nvSpPr>
+            <p:cNvPr id="18" name="TextBox 17">
+              <a:extLst>
+                <a:ext uri="{FF2B5EF4-FFF2-40B4-BE49-F238E27FC236}">
+                  <a16:creationId xmlns:a16="http://schemas.microsoft.com/office/drawing/2014/main" id="{28ED3DE8-2F3F-5FE3-1781-5F3FAF4FF647}"/>
+                </a:ext>
+              </a:extLst>
+            </p:cNvPr>
+            <p:cNvSpPr txBox="1"/>
+            <p:nvPr/>
+          </p:nvSpPr>
+          <p:spPr>
+            <a:xfrm>
+              <a:off x="4616583" y="3950567"/>
+              <a:ext cx="2136808" cy="261610"/>
+            </a:xfrm>
+            <a:prstGeom prst="rect">
+              <a:avLst/>
+            </a:prstGeom>
+            <a:noFill/>
+          </p:spPr>
+          <p:txBody>
+            <a:bodyPr wrap="square" rtlCol="0">
+              <a:spAutoFit/>
+            </a:bodyPr>
+            <a:lstStyle/>
+            <a:p>
+              <a:r>
+                <a:rPr lang="en-IN" sz="1050" dirty="0">
+                  <a:latin typeface="Arial" panose="020B0604020202020204" pitchFamily="34" charset="0"/>
+                  <a:cs typeface="Arial" panose="020B0604020202020204" pitchFamily="34" charset="0"/>
+                </a:rPr>
+                <a:t>Defocus (µm)</a:t>
+              </a:r>
+            </a:p>
+          </p:txBody>
+        </p:sp>
+        <p:sp>
+          <p:nvSpPr>
+            <p:cNvPr id="19" name="TextBox 18">
+              <a:extLst>
+                <a:ext uri="{FF2B5EF4-FFF2-40B4-BE49-F238E27FC236}">
+                  <a16:creationId xmlns:a16="http://schemas.microsoft.com/office/drawing/2014/main" id="{DA44816D-9A5C-1F3B-BCE0-1C678B6238AE}"/>
+                </a:ext>
+              </a:extLst>
+            </p:cNvPr>
+            <p:cNvSpPr txBox="1"/>
+            <p:nvPr/>
+          </p:nvSpPr>
+          <p:spPr>
+            <a:xfrm>
+              <a:off x="7669485" y="3921447"/>
+              <a:ext cx="2136808" cy="261610"/>
+            </a:xfrm>
+            <a:prstGeom prst="rect">
+              <a:avLst/>
+            </a:prstGeom>
+            <a:noFill/>
+          </p:spPr>
+          <p:txBody>
+            <a:bodyPr wrap="square" rtlCol="0">
+              <a:spAutoFit/>
+            </a:bodyPr>
+            <a:lstStyle/>
+            <a:p>
+              <a:r>
+                <a:rPr lang="en-IN" sz="1050" dirty="0">
+                  <a:latin typeface="Arial" panose="020B0604020202020204" pitchFamily="34" charset="0"/>
+                  <a:cs typeface="Arial" panose="020B0604020202020204" pitchFamily="34" charset="0"/>
+                </a:rPr>
+                <a:t>Defocus (µm)</a:t>
+              </a:r>
+            </a:p>
+          </p:txBody>
+        </p:sp>
+        <p:sp>
+          <p:nvSpPr>
+            <p:cNvPr id="20" name="TextBox 19">
+              <a:extLst>
+                <a:ext uri="{FF2B5EF4-FFF2-40B4-BE49-F238E27FC236}">
+                  <a16:creationId xmlns:a16="http://schemas.microsoft.com/office/drawing/2014/main" id="{79C5F008-2430-431F-65E5-420D4D091252}"/>
+                </a:ext>
+              </a:extLst>
+            </p:cNvPr>
+            <p:cNvSpPr txBox="1"/>
+            <p:nvPr/>
+          </p:nvSpPr>
+          <p:spPr>
+            <a:xfrm>
+              <a:off x="10722387" y="3921447"/>
+              <a:ext cx="2136808" cy="261610"/>
+            </a:xfrm>
+            <a:prstGeom prst="rect">
+              <a:avLst/>
+            </a:prstGeom>
+            <a:noFill/>
+          </p:spPr>
+          <p:txBody>
+            <a:bodyPr wrap="square" rtlCol="0">
+              <a:spAutoFit/>
+            </a:bodyPr>
+            <a:lstStyle/>
+            <a:p>
+              <a:r>
+                <a:rPr lang="en-IN" sz="1050" dirty="0">
+                  <a:latin typeface="Arial" panose="020B0604020202020204" pitchFamily="34" charset="0"/>
+                  <a:cs typeface="Arial" panose="020B0604020202020204" pitchFamily="34" charset="0"/>
+                </a:rPr>
+                <a:t>Defocus (µm)</a:t>
+              </a:r>
+            </a:p>
+          </p:txBody>
+        </p:sp>
+        <p:sp>
+          <p:nvSpPr>
+            <p:cNvPr id="21" name="Arrow: Right 20">
+              <a:extLst>
+                <a:ext uri="{FF2B5EF4-FFF2-40B4-BE49-F238E27FC236}">
+                  <a16:creationId xmlns:a16="http://schemas.microsoft.com/office/drawing/2014/main" id="{A21DE280-603B-EC46-5E48-4F5DD6EC36F7}"/>
+                </a:ext>
+              </a:extLst>
+            </p:cNvPr>
+            <p:cNvSpPr/>
+            <p:nvPr/>
+          </p:nvSpPr>
+          <p:spPr>
+            <a:xfrm rot="19594502">
+              <a:off x="1586759" y="2216444"/>
+              <a:ext cx="346510" cy="142594"/>
+            </a:xfrm>
+            <a:prstGeom prst="rightArrow">
+              <a:avLst/>
+            </a:prstGeom>
+            <a:solidFill>
+              <a:srgbClr val="FFC000"/>
+            </a:solidFill>
+            <a:ln>
+              <a:noFill/>
+            </a:ln>
+          </p:spPr>
+          <p:style>
+            <a:lnRef idx="2">
+              <a:schemeClr val="accent1">
+                <a:shade val="15000"/>
+              </a:schemeClr>
+            </a:lnRef>
+            <a:fillRef idx="1">
+              <a:schemeClr val="accent1"/>
+            </a:fillRef>
+            <a:effectRef idx="0">
+              <a:schemeClr val="accent1"/>
+            </a:effectRef>
+            <a:fontRef idx="minor">
+              <a:schemeClr val="lt1"/>
+            </a:fontRef>
+          </p:style>
+          <p:txBody>
+            <a:bodyPr rtlCol="0" anchor="ctr"/>
+            <a:lstStyle/>
+            <a:p>
+              <a:pPr algn="ctr"/>
+              <a:endParaRPr lang="en-IN"/>
+            </a:p>
+          </p:txBody>
+        </p:sp>
+        <p:sp>
+          <p:nvSpPr>
+            <p:cNvPr id="22" name="TextBox 21">
+              <a:extLst>
+                <a:ext uri="{FF2B5EF4-FFF2-40B4-BE49-F238E27FC236}">
+                  <a16:creationId xmlns:a16="http://schemas.microsoft.com/office/drawing/2014/main" id="{34EDEFDB-CCE5-A2CE-0189-2FE209681C57}"/>
+                </a:ext>
+              </a:extLst>
+            </p:cNvPr>
+            <p:cNvSpPr txBox="1"/>
+            <p:nvPr/>
+          </p:nvSpPr>
+          <p:spPr>
+            <a:xfrm>
+              <a:off x="908809" y="2287741"/>
+              <a:ext cx="1476509" cy="430887"/>
+            </a:xfrm>
+            <a:prstGeom prst="rect">
+              <a:avLst/>
+            </a:prstGeom>
+            <a:noFill/>
+          </p:spPr>
+          <p:txBody>
+            <a:bodyPr wrap="square" rtlCol="0">
+              <a:spAutoFit/>
+            </a:bodyPr>
+            <a:lstStyle/>
+            <a:p>
+              <a:r>
+                <a:rPr lang="en-IN" sz="1100" b="1" dirty="0">
+                  <a:latin typeface="Arial" panose="020B0604020202020204" pitchFamily="34" charset="0"/>
+                  <a:cs typeface="Arial" panose="020B0604020202020204" pitchFamily="34" charset="0"/>
+                </a:rPr>
+                <a:t>Global </a:t>
+              </a:r>
+            </a:p>
+            <a:p>
+              <a:r>
+                <a:rPr lang="en-IN" sz="1100" b="1" dirty="0">
+                  <a:latin typeface="Arial" panose="020B0604020202020204" pitchFamily="34" charset="0"/>
+                  <a:cs typeface="Arial" panose="020B0604020202020204" pitchFamily="34" charset="0"/>
+                </a:rPr>
+                <a:t>maximum</a:t>
+              </a:r>
+            </a:p>
+          </p:txBody>
+        </p:sp>
+        <p:sp>
+          <p:nvSpPr>
+            <p:cNvPr id="25" name="TextBox 24">
+              <a:extLst>
+                <a:ext uri="{FF2B5EF4-FFF2-40B4-BE49-F238E27FC236}">
+                  <a16:creationId xmlns:a16="http://schemas.microsoft.com/office/drawing/2014/main" id="{18089721-01F9-BBDA-9D40-A96D6012E96A}"/>
+                </a:ext>
+              </a:extLst>
+            </p:cNvPr>
+            <p:cNvSpPr txBox="1"/>
+            <p:nvPr/>
+          </p:nvSpPr>
+          <p:spPr>
+            <a:xfrm>
+              <a:off x="2541614" y="1926766"/>
+              <a:ext cx="993862" cy="161583"/>
+            </a:xfrm>
+            <a:prstGeom prst="rect">
+              <a:avLst/>
+            </a:prstGeom>
+            <a:noFill/>
+            <a:ln>
+              <a:noFill/>
+            </a:ln>
+          </p:spPr>
+          <p:txBody>
+            <a:bodyPr wrap="none" lIns="0" tIns="0" rIns="0" bIns="0" rtlCol="0">
+              <a:spAutoFit/>
+            </a:bodyPr>
+            <a:lstStyle/>
+            <a:p>
+              <a:r>
+                <a:rPr lang="en-IN" sz="1050" b="1" dirty="0">
+                  <a:latin typeface="Arial" panose="020B0604020202020204" pitchFamily="34" charset="0"/>
+                  <a:cs typeface="Arial" panose="020B0604020202020204" pitchFamily="34" charset="0"/>
+                </a:rPr>
+                <a:t>Pure Amplitude</a:t>
+              </a:r>
+            </a:p>
+          </p:txBody>
+        </p:sp>
+        <p:sp>
+          <p:nvSpPr>
+            <p:cNvPr id="26" name="TextBox 25">
+              <a:extLst>
+                <a:ext uri="{FF2B5EF4-FFF2-40B4-BE49-F238E27FC236}">
+                  <a16:creationId xmlns:a16="http://schemas.microsoft.com/office/drawing/2014/main" id="{9AC2E2BE-9C7A-A59B-D4C2-2365BB923995}"/>
+                </a:ext>
+              </a:extLst>
+            </p:cNvPr>
+            <p:cNvSpPr txBox="1"/>
+            <p:nvPr/>
+          </p:nvSpPr>
+          <p:spPr>
+            <a:xfrm>
+              <a:off x="590341" y="1863500"/>
+              <a:ext cx="462013" cy="369332"/>
+            </a:xfrm>
+            <a:prstGeom prst="rect">
+              <a:avLst/>
+            </a:prstGeom>
+            <a:noFill/>
+          </p:spPr>
+          <p:txBody>
+            <a:bodyPr wrap="square" rtlCol="0">
+              <a:spAutoFit/>
+            </a:bodyPr>
+            <a:lstStyle/>
+            <a:p>
+              <a:r>
+                <a:rPr lang="en-IN" b="1" dirty="0">
+                  <a:solidFill>
+                    <a:srgbClr val="002060"/>
+                  </a:solidFill>
+                </a:rPr>
+                <a:t>(a)</a:t>
+              </a:r>
+            </a:p>
+          </p:txBody>
+        </p:sp>
+        <p:sp>
+          <p:nvSpPr>
+            <p:cNvPr id="27" name="TextBox 26">
+              <a:extLst>
+                <a:ext uri="{FF2B5EF4-FFF2-40B4-BE49-F238E27FC236}">
+                  <a16:creationId xmlns:a16="http://schemas.microsoft.com/office/drawing/2014/main" id="{83170941-5C5D-E04C-37BA-B31B602B39BB}"/>
+                </a:ext>
+              </a:extLst>
+            </p:cNvPr>
+            <p:cNvSpPr txBox="1"/>
+            <p:nvPr/>
+          </p:nvSpPr>
+          <p:spPr>
+            <a:xfrm>
+              <a:off x="5372921" y="1926765"/>
+              <a:ext cx="1191032" cy="161583"/>
+            </a:xfrm>
+            <a:prstGeom prst="rect">
+              <a:avLst/>
+            </a:prstGeom>
+            <a:solidFill>
+              <a:schemeClr val="bg1"/>
+            </a:solidFill>
+            <a:ln>
+              <a:noFill/>
+            </a:ln>
+          </p:spPr>
+          <p:txBody>
+            <a:bodyPr wrap="none" lIns="0" tIns="0" rIns="0" bIns="0" rtlCol="0">
+              <a:spAutoFit/>
+            </a:bodyPr>
+            <a:lstStyle/>
+            <a:p>
+              <a:r>
+                <a:rPr lang="en-IN" sz="1050" b="1" dirty="0">
+                  <a:latin typeface="Arial" panose="020B0604020202020204" pitchFamily="34" charset="0"/>
+                  <a:cs typeface="Arial" panose="020B0604020202020204" pitchFamily="34" charset="0"/>
+                </a:rPr>
+                <a:t>Pure Phase (weak)</a:t>
+              </a:r>
+            </a:p>
+          </p:txBody>
+        </p:sp>
+        <p:sp>
+          <p:nvSpPr>
+            <p:cNvPr id="28" name="Arrow: Right 27">
+              <a:extLst>
+                <a:ext uri="{FF2B5EF4-FFF2-40B4-BE49-F238E27FC236}">
+                  <a16:creationId xmlns:a16="http://schemas.microsoft.com/office/drawing/2014/main" id="{E22903F2-88AB-05DC-51C1-8FFA50D38FA4}"/>
+                </a:ext>
+              </a:extLst>
+            </p:cNvPr>
+            <p:cNvSpPr/>
+            <p:nvPr/>
+          </p:nvSpPr>
+          <p:spPr>
+            <a:xfrm rot="1242917">
+              <a:off x="4682089" y="3379241"/>
+              <a:ext cx="346510" cy="142594"/>
+            </a:xfrm>
+            <a:prstGeom prst="rightArrow">
+              <a:avLst/>
+            </a:prstGeom>
+            <a:solidFill>
+              <a:srgbClr val="FFC000"/>
+            </a:solidFill>
+            <a:ln>
+              <a:noFill/>
+            </a:ln>
+          </p:spPr>
+          <p:style>
+            <a:lnRef idx="2">
+              <a:schemeClr val="accent1">
+                <a:shade val="15000"/>
+              </a:schemeClr>
+            </a:lnRef>
+            <a:fillRef idx="1">
+              <a:schemeClr val="accent1"/>
+            </a:fillRef>
+            <a:effectRef idx="0">
+              <a:schemeClr val="accent1"/>
+            </a:effectRef>
+            <a:fontRef idx="minor">
+              <a:schemeClr val="lt1"/>
+            </a:fontRef>
+          </p:style>
+          <p:txBody>
+            <a:bodyPr rtlCol="0" anchor="ctr"/>
+            <a:lstStyle/>
+            <a:p>
+              <a:pPr algn="ctr"/>
+              <a:endParaRPr lang="en-IN"/>
+            </a:p>
+          </p:txBody>
+        </p:sp>
+        <p:sp>
+          <p:nvSpPr>
+            <p:cNvPr id="29" name="TextBox 28">
+              <a:extLst>
+                <a:ext uri="{FF2B5EF4-FFF2-40B4-BE49-F238E27FC236}">
+                  <a16:creationId xmlns:a16="http://schemas.microsoft.com/office/drawing/2014/main" id="{2F511207-15AE-9DDC-25FD-6D73C7D37BB8}"/>
+                </a:ext>
+              </a:extLst>
+            </p:cNvPr>
+            <p:cNvSpPr txBox="1"/>
+            <p:nvPr/>
+          </p:nvSpPr>
+          <p:spPr>
+            <a:xfrm>
+              <a:off x="3852710" y="3066146"/>
+              <a:ext cx="868083" cy="430887"/>
+            </a:xfrm>
+            <a:prstGeom prst="rect">
+              <a:avLst/>
+            </a:prstGeom>
+            <a:noFill/>
+          </p:spPr>
+          <p:txBody>
+            <a:bodyPr wrap="square" rtlCol="0">
+              <a:spAutoFit/>
+            </a:bodyPr>
+            <a:lstStyle/>
+            <a:p>
+              <a:r>
+                <a:rPr lang="en-IN" sz="1100" b="1" dirty="0">
+                  <a:latin typeface="Arial" panose="020B0604020202020204" pitchFamily="34" charset="0"/>
+                  <a:cs typeface="Arial" panose="020B0604020202020204" pitchFamily="34" charset="0"/>
+                </a:rPr>
+                <a:t>Global </a:t>
+              </a:r>
+            </a:p>
+            <a:p>
+              <a:r>
+                <a:rPr lang="en-IN" sz="1100" b="1" dirty="0">
+                  <a:latin typeface="Arial" panose="020B0604020202020204" pitchFamily="34" charset="0"/>
+                  <a:cs typeface="Arial" panose="020B0604020202020204" pitchFamily="34" charset="0"/>
+                </a:rPr>
+                <a:t>minimum</a:t>
+              </a:r>
+            </a:p>
+          </p:txBody>
+        </p:sp>
+        <p:sp>
+          <p:nvSpPr>
+            <p:cNvPr id="30" name="TextBox 29">
+              <a:extLst>
+                <a:ext uri="{FF2B5EF4-FFF2-40B4-BE49-F238E27FC236}">
+                  <a16:creationId xmlns:a16="http://schemas.microsoft.com/office/drawing/2014/main" id="{F6E48AB8-6759-8AD6-191C-8F28B7D18A16}"/>
+                </a:ext>
+              </a:extLst>
+            </p:cNvPr>
+            <p:cNvSpPr txBox="1"/>
+            <p:nvPr/>
+          </p:nvSpPr>
+          <p:spPr>
+            <a:xfrm>
+              <a:off x="3631729" y="1876904"/>
+              <a:ext cx="472612" cy="369332"/>
+            </a:xfrm>
+            <a:prstGeom prst="rect">
+              <a:avLst/>
+            </a:prstGeom>
+            <a:solidFill>
+              <a:schemeClr val="bg1"/>
+            </a:solidFill>
+          </p:spPr>
+          <p:txBody>
+            <a:bodyPr wrap="square" rtlCol="0">
+              <a:spAutoFit/>
+            </a:bodyPr>
+            <a:lstStyle/>
+            <a:p>
+              <a:r>
+                <a:rPr lang="en-IN" b="1" dirty="0"/>
+                <a:t>(b)</a:t>
+              </a:r>
+            </a:p>
+          </p:txBody>
+        </p:sp>
+        <p:sp>
+          <p:nvSpPr>
+            <p:cNvPr id="31" name="TextBox 30">
+              <a:extLst>
+                <a:ext uri="{FF2B5EF4-FFF2-40B4-BE49-F238E27FC236}">
+                  <a16:creationId xmlns:a16="http://schemas.microsoft.com/office/drawing/2014/main" id="{CBBAFDB9-DCA0-F361-818C-145D8C6EE6B1}"/>
+                </a:ext>
+              </a:extLst>
+            </p:cNvPr>
+            <p:cNvSpPr txBox="1"/>
+            <p:nvPr/>
+          </p:nvSpPr>
+          <p:spPr>
+            <a:xfrm>
+              <a:off x="8335567" y="1929711"/>
+              <a:ext cx="1279196" cy="161583"/>
+            </a:xfrm>
+            <a:prstGeom prst="rect">
+              <a:avLst/>
+            </a:prstGeom>
+            <a:solidFill>
+              <a:schemeClr val="bg1"/>
+            </a:solidFill>
+            <a:ln>
+              <a:noFill/>
+            </a:ln>
+          </p:spPr>
+          <p:txBody>
+            <a:bodyPr wrap="none" lIns="0" tIns="0" rIns="0" bIns="0" rtlCol="0">
+              <a:spAutoFit/>
+            </a:bodyPr>
+            <a:lstStyle/>
+            <a:p>
+              <a:r>
+                <a:rPr lang="en-IN" sz="1050" b="1" dirty="0">
+                  <a:latin typeface="Arial" panose="020B0604020202020204" pitchFamily="34" charset="0"/>
+                  <a:cs typeface="Arial" panose="020B0604020202020204" pitchFamily="34" charset="0"/>
+                </a:rPr>
+                <a:t>Pure Phase (strong)</a:t>
+              </a:r>
+            </a:p>
+          </p:txBody>
+        </p:sp>
+        <p:sp>
+          <p:nvSpPr>
+            <p:cNvPr id="32" name="Arrow: Right 31">
+              <a:extLst>
+                <a:ext uri="{FF2B5EF4-FFF2-40B4-BE49-F238E27FC236}">
+                  <a16:creationId xmlns:a16="http://schemas.microsoft.com/office/drawing/2014/main" id="{16F07311-336F-A23C-D726-FA565E581A7E}"/>
+                </a:ext>
+              </a:extLst>
+            </p:cNvPr>
+            <p:cNvSpPr/>
+            <p:nvPr/>
+          </p:nvSpPr>
+          <p:spPr>
+            <a:xfrm rot="790287">
+              <a:off x="7542396" y="3250101"/>
+              <a:ext cx="472502" cy="148559"/>
+            </a:xfrm>
+            <a:prstGeom prst="rightArrow">
+              <a:avLst/>
+            </a:prstGeom>
+            <a:solidFill>
+              <a:srgbClr val="FFC000"/>
+            </a:solidFill>
+            <a:ln>
+              <a:noFill/>
+            </a:ln>
+          </p:spPr>
+          <p:style>
+            <a:lnRef idx="2">
+              <a:schemeClr val="accent1">
+                <a:shade val="15000"/>
+              </a:schemeClr>
+            </a:lnRef>
+            <a:fillRef idx="1">
+              <a:schemeClr val="accent1"/>
+            </a:fillRef>
+            <a:effectRef idx="0">
+              <a:schemeClr val="accent1"/>
+            </a:effectRef>
+            <a:fontRef idx="minor">
+              <a:schemeClr val="lt1"/>
+            </a:fontRef>
+          </p:style>
+          <p:txBody>
+            <a:bodyPr rtlCol="0" anchor="ctr"/>
+            <a:lstStyle/>
+            <a:p>
+              <a:pPr algn="ctr"/>
+              <a:endParaRPr lang="en-IN"/>
+            </a:p>
+          </p:txBody>
+        </p:sp>
+        <p:sp>
+          <p:nvSpPr>
+            <p:cNvPr id="33" name="TextBox 32">
+              <a:extLst>
+                <a:ext uri="{FF2B5EF4-FFF2-40B4-BE49-F238E27FC236}">
+                  <a16:creationId xmlns:a16="http://schemas.microsoft.com/office/drawing/2014/main" id="{18EB0007-D773-CB07-70F9-B722CDFC9ECB}"/>
+                </a:ext>
+              </a:extLst>
+            </p:cNvPr>
+            <p:cNvSpPr txBox="1"/>
+            <p:nvPr/>
+          </p:nvSpPr>
+          <p:spPr>
+            <a:xfrm>
+              <a:off x="6680265" y="3059721"/>
+              <a:ext cx="1041974" cy="261610"/>
+            </a:xfrm>
+            <a:prstGeom prst="rect">
+              <a:avLst/>
+            </a:prstGeom>
+            <a:noFill/>
+          </p:spPr>
+          <p:txBody>
+            <a:bodyPr wrap="square" rtlCol="0">
+              <a:spAutoFit/>
+            </a:bodyPr>
+            <a:lstStyle/>
+            <a:p>
+              <a:r>
+                <a:rPr lang="en-IN" sz="1100" b="1" dirty="0">
+                  <a:latin typeface="Arial" panose="020B0604020202020204" pitchFamily="34" charset="0"/>
+                  <a:cs typeface="Arial" panose="020B0604020202020204" pitchFamily="34" charset="0"/>
+                </a:rPr>
+                <a:t>False peak</a:t>
+              </a:r>
+            </a:p>
+          </p:txBody>
+        </p:sp>
+        <p:sp>
+          <p:nvSpPr>
+            <p:cNvPr id="34" name="TextBox 33">
+              <a:extLst>
+                <a:ext uri="{FF2B5EF4-FFF2-40B4-BE49-F238E27FC236}">
+                  <a16:creationId xmlns:a16="http://schemas.microsoft.com/office/drawing/2014/main" id="{97987201-7247-C425-6795-2B138B72C9CE}"/>
+                </a:ext>
+              </a:extLst>
+            </p:cNvPr>
+            <p:cNvSpPr txBox="1"/>
+            <p:nvPr/>
+          </p:nvSpPr>
+          <p:spPr>
+            <a:xfrm>
+              <a:off x="6680265" y="1876904"/>
+              <a:ext cx="472612" cy="369332"/>
+            </a:xfrm>
+            <a:prstGeom prst="rect">
+              <a:avLst/>
+            </a:prstGeom>
+            <a:solidFill>
+              <a:schemeClr val="bg1"/>
+            </a:solidFill>
+          </p:spPr>
+          <p:txBody>
+            <a:bodyPr wrap="square" rtlCol="0">
+              <a:spAutoFit/>
+            </a:bodyPr>
+            <a:lstStyle/>
+            <a:p>
+              <a:r>
+                <a:rPr lang="en-IN" b="1" dirty="0"/>
+                <a:t>(c)</a:t>
+              </a:r>
+            </a:p>
+          </p:txBody>
+        </p:sp>
+        <p:sp>
+          <p:nvSpPr>
+            <p:cNvPr id="44" name="TextBox 43">
+              <a:extLst>
+                <a:ext uri="{FF2B5EF4-FFF2-40B4-BE49-F238E27FC236}">
+                  <a16:creationId xmlns:a16="http://schemas.microsoft.com/office/drawing/2014/main" id="{0D5C85D9-F8AD-3F8A-CEC4-1BB7F315FF8E}"/>
+                </a:ext>
+              </a:extLst>
+            </p:cNvPr>
+            <p:cNvSpPr txBox="1"/>
+            <p:nvPr/>
+          </p:nvSpPr>
+          <p:spPr>
+            <a:xfrm>
+              <a:off x="11560041" y="1926765"/>
+              <a:ext cx="1024319" cy="161583"/>
+            </a:xfrm>
+            <a:prstGeom prst="rect">
+              <a:avLst/>
+            </a:prstGeom>
+            <a:solidFill>
+              <a:schemeClr val="bg1"/>
+            </a:solidFill>
+            <a:ln>
+              <a:noFill/>
+            </a:ln>
+          </p:spPr>
+          <p:txBody>
+            <a:bodyPr wrap="none" lIns="0" tIns="0" rIns="0" bIns="0" rtlCol="0">
+              <a:spAutoFit/>
+            </a:bodyPr>
+            <a:lstStyle/>
+            <a:p>
+              <a:r>
+                <a:rPr lang="en-IN" sz="1050" b="1" dirty="0">
+                  <a:latin typeface="Arial" panose="020B0604020202020204" pitchFamily="34" charset="0"/>
+                  <a:cs typeface="Arial" panose="020B0604020202020204" pitchFamily="34" charset="0"/>
+                </a:rPr>
+                <a:t>Complex Object</a:t>
+              </a:r>
+            </a:p>
+          </p:txBody>
+        </p:sp>
+        <p:sp>
+          <p:nvSpPr>
+            <p:cNvPr id="45" name="Arrow: Right 44">
+              <a:extLst>
+                <a:ext uri="{FF2B5EF4-FFF2-40B4-BE49-F238E27FC236}">
+                  <a16:creationId xmlns:a16="http://schemas.microsoft.com/office/drawing/2014/main" id="{3EE8F891-90B5-7B1D-12C9-8BBDEEAB6260}"/>
+                </a:ext>
+              </a:extLst>
+            </p:cNvPr>
+            <p:cNvSpPr/>
+            <p:nvPr/>
+          </p:nvSpPr>
+          <p:spPr>
+            <a:xfrm rot="5400000">
+              <a:off x="10016229" y="2692001"/>
+              <a:ext cx="346510" cy="142594"/>
+            </a:xfrm>
+            <a:prstGeom prst="rightArrow">
+              <a:avLst/>
+            </a:prstGeom>
+            <a:solidFill>
+              <a:srgbClr val="FFC000"/>
+            </a:solidFill>
+            <a:ln>
+              <a:noFill/>
+            </a:ln>
+          </p:spPr>
+          <p:style>
+            <a:lnRef idx="2">
+              <a:schemeClr val="accent1">
+                <a:shade val="15000"/>
+              </a:schemeClr>
+            </a:lnRef>
+            <a:fillRef idx="1">
+              <a:schemeClr val="accent1"/>
+            </a:fillRef>
+            <a:effectRef idx="0">
+              <a:schemeClr val="accent1"/>
+            </a:effectRef>
+            <a:fontRef idx="minor">
+              <a:schemeClr val="lt1"/>
+            </a:fontRef>
+          </p:style>
+          <p:txBody>
+            <a:bodyPr rtlCol="0" anchor="ctr"/>
+            <a:lstStyle/>
+            <a:p>
+              <a:pPr algn="ctr"/>
+              <a:endParaRPr lang="en-IN" dirty="0"/>
+            </a:p>
+          </p:txBody>
+        </p:sp>
+        <p:sp>
+          <p:nvSpPr>
+            <p:cNvPr id="46" name="Arrow: Right 45">
+              <a:extLst>
+                <a:ext uri="{FF2B5EF4-FFF2-40B4-BE49-F238E27FC236}">
+                  <a16:creationId xmlns:a16="http://schemas.microsoft.com/office/drawing/2014/main" id="{4EBFDAA5-D170-15EC-858A-C268BC6BAABE}"/>
+                </a:ext>
+              </a:extLst>
+            </p:cNvPr>
+            <p:cNvSpPr/>
+            <p:nvPr/>
+          </p:nvSpPr>
+          <p:spPr>
+            <a:xfrm rot="5400000">
+              <a:off x="11658609" y="2697954"/>
+              <a:ext cx="346510" cy="142594"/>
+            </a:xfrm>
+            <a:prstGeom prst="rightArrow">
+              <a:avLst/>
+            </a:prstGeom>
+            <a:solidFill>
+              <a:srgbClr val="FFC000"/>
+            </a:solidFill>
+            <a:ln>
+              <a:noFill/>
+            </a:ln>
+          </p:spPr>
+          <p:style>
+            <a:lnRef idx="2">
+              <a:schemeClr val="accent1">
+                <a:shade val="15000"/>
+              </a:schemeClr>
+            </a:lnRef>
+            <a:fillRef idx="1">
+              <a:schemeClr val="accent1"/>
+            </a:fillRef>
+            <a:effectRef idx="0">
+              <a:schemeClr val="accent1"/>
+            </a:effectRef>
+            <a:fontRef idx="minor">
+              <a:schemeClr val="lt1"/>
+            </a:fontRef>
+          </p:style>
+          <p:txBody>
+            <a:bodyPr rtlCol="0" anchor="ctr"/>
+            <a:lstStyle/>
+            <a:p>
+              <a:pPr algn="ctr"/>
+              <a:endParaRPr lang="en-IN"/>
+            </a:p>
+          </p:txBody>
+        </p:sp>
+        <p:sp>
+          <p:nvSpPr>
+            <p:cNvPr id="47" name="TextBox 46">
+              <a:extLst>
+                <a:ext uri="{FF2B5EF4-FFF2-40B4-BE49-F238E27FC236}">
+                  <a16:creationId xmlns:a16="http://schemas.microsoft.com/office/drawing/2014/main" id="{33146EBF-A508-8989-449D-6046F801B559}"/>
+                </a:ext>
+              </a:extLst>
+            </p:cNvPr>
+            <p:cNvSpPr txBox="1"/>
+            <p:nvPr/>
+          </p:nvSpPr>
+          <p:spPr>
+            <a:xfrm>
+              <a:off x="9949342" y="2287741"/>
+              <a:ext cx="1041974" cy="261610"/>
+            </a:xfrm>
+            <a:prstGeom prst="rect">
+              <a:avLst/>
+            </a:prstGeom>
+            <a:noFill/>
+          </p:spPr>
+          <p:txBody>
+            <a:bodyPr wrap="square" rtlCol="0">
+              <a:spAutoFit/>
+            </a:bodyPr>
+            <a:lstStyle/>
+            <a:p>
+              <a:r>
+                <a:rPr lang="en-IN" sz="1100" b="1" dirty="0">
+                  <a:latin typeface="Arial" panose="020B0604020202020204" pitchFamily="34" charset="0"/>
+                  <a:cs typeface="Arial" panose="020B0604020202020204" pitchFamily="34" charset="0"/>
+                </a:rPr>
+                <a:t>Asymmetry</a:t>
+              </a:r>
+            </a:p>
+          </p:txBody>
+        </p:sp>
+        <p:sp>
+          <p:nvSpPr>
+            <p:cNvPr id="48" name="TextBox 47">
+              <a:extLst>
+                <a:ext uri="{FF2B5EF4-FFF2-40B4-BE49-F238E27FC236}">
+                  <a16:creationId xmlns:a16="http://schemas.microsoft.com/office/drawing/2014/main" id="{20E0BE2B-7822-B2DC-C092-044D1ECA574E}"/>
+                </a:ext>
+              </a:extLst>
+            </p:cNvPr>
+            <p:cNvSpPr txBox="1"/>
+            <p:nvPr/>
+          </p:nvSpPr>
+          <p:spPr>
+            <a:xfrm>
+              <a:off x="9703385" y="1876904"/>
+              <a:ext cx="472612" cy="369332"/>
+            </a:xfrm>
+            <a:prstGeom prst="rect">
+              <a:avLst/>
+            </a:prstGeom>
+            <a:solidFill>
+              <a:schemeClr val="bg1"/>
+            </a:solidFill>
+          </p:spPr>
+          <p:txBody>
+            <a:bodyPr wrap="square" rtlCol="0">
+              <a:spAutoFit/>
+            </a:bodyPr>
+            <a:lstStyle/>
+            <a:p>
+              <a:r>
+                <a:rPr lang="en-IN" b="1" dirty="0"/>
+                <a:t>(d)</a:t>
+              </a:r>
+            </a:p>
+          </p:txBody>
+        </p:sp>
+      </p:grpSp>
+    </p:spTree>
+    <p:extLst>
+      <p:ext uri="{BB962C8B-B14F-4D97-AF65-F5344CB8AC3E}">
+        <p14:creationId xmlns:p14="http://schemas.microsoft.com/office/powerpoint/2010/main" val="243105227"/>
+      </p:ext>
+    </p:extLst>
+  </p:cSld>
+  <p:clrMapOvr>
+    <a:masterClrMapping/>
+  </p:clrMapOvr>
+</p:sld>
+</file>
+
+<file path=ppt/slides/slide5.xml><?xml version="1.0" encoding="utf-8"?>
+<p:sld xmlns:a="http://schemas.openxmlformats.org/drawingml/2006/main" xmlns:r="http://schemas.openxmlformats.org/officeDocument/2006/relationships" xmlns:p="http://schemas.openxmlformats.org/presentationml/2006/main">
+  <p:cSld>
+    <p:spTree>
+      <p:nvGrpSpPr>
+        <p:cNvPr id="1" name="">
+          <a:extLst>
+            <a:ext uri="{FF2B5EF4-FFF2-40B4-BE49-F238E27FC236}">
+              <a16:creationId xmlns:a16="http://schemas.microsoft.com/office/drawing/2014/main" id="{F888FBF8-1E3C-B86B-F836-8C553648E15F}"/>
+            </a:ext>
+          </a:extLst>
+        </p:cNvPr>
+        <p:cNvGrpSpPr/>
+        <p:nvPr/>
+      </p:nvGrpSpPr>
+      <p:grpSpPr>
+        <a:xfrm>
+          <a:off x="0" y="0"/>
+          <a:ext cx="0" cy="0"/>
+          <a:chOff x="0" y="0"/>
+          <a:chExt cx="0" cy="0"/>
+        </a:xfrm>
+      </p:grpSpPr>
+    </p:spTree>
+    <p:extLst>
+      <p:ext uri="{BB962C8B-B14F-4D97-AF65-F5344CB8AC3E}">
+        <p14:creationId xmlns:p14="http://schemas.microsoft.com/office/powerpoint/2010/main" val="2784291344"/>
+      </p:ext>
+    </p:extLst>
+  </p:cSld>
+  <p:clrMapOvr>
+    <a:masterClrMapping/>
+  </p:clrMapOvr>
+</p:sld>
+</file>
+
 <file path=ppt/theme/theme1.xml><?xml version="1.0" encoding="utf-8"?>
 <a:theme xmlns:a="http://schemas.openxmlformats.org/drawingml/2006/main" name="Office Theme">
   <a:themeElements>
